--- a/docs/example9_walkthrough.pptx
+++ b/docs/example9_walkthrough.pptx
@@ -9,6 +9,7 @@
     <p:sldId id="257" r:id="rId8"/>
     <p:sldId id="258" r:id="rId9"/>
     <p:sldId id="259" r:id="rId10"/>
+    <p:sldId id="260" r:id="rId11"/>
   </p:sldIdLst>
   <p:sldSz cx="9144000" cy="6858000" type="screen4x3"/>
   <p:notesSz cx="6858000" cy="9144000"/>
@@ -3505,7 +3506,7 @@
             <a:r>
               <a:rPr sz="1600">
                 <a:solidFill>
-                  <a:srgbClr val="EEFFFF"/>
+                  <a:srgbClr val="BAC2DE"/>
                 </a:solidFill>
                 <a:latin typeface="Consolas"/>
               </a:rPr>
@@ -3523,7 +3524,7 @@
             <a:r>
               <a:rPr sz="1600">
                 <a:solidFill>
-                  <a:srgbClr val="EEFFFF"/>
+                  <a:srgbClr val="BAC2DE"/>
                 </a:solidFill>
                 <a:latin typeface="Consolas"/>
               </a:rPr>
@@ -3603,7 +3604,7 @@
             <a:r>
               <a:rPr sz="1600">
                 <a:solidFill>
-                  <a:srgbClr val="EEFFFF"/>
+                  <a:srgbClr val="BAC2DE"/>
                 </a:solidFill>
                 <a:latin typeface="Consolas"/>
               </a:rPr>
@@ -3621,7 +3622,7 @@
             <a:r>
               <a:rPr sz="1600">
                 <a:solidFill>
-                  <a:srgbClr val="EEFFFF"/>
+                  <a:srgbClr val="BAC2DE"/>
                 </a:solidFill>
                 <a:latin typeface="Consolas"/>
               </a:rPr>
@@ -3688,7 +3689,7 @@
             <a:r>
               <a:rPr sz="1600">
                 <a:solidFill>
-                  <a:srgbClr val="EEFFFF"/>
+                  <a:srgbClr val="BAC2DE"/>
                 </a:solidFill>
                 <a:latin typeface="Consolas"/>
               </a:rPr>
@@ -3697,7 +3698,7 @@
             <a:r>
               <a:rPr sz="1600">
                 <a:solidFill>
-                  <a:srgbClr val="EEFFFF"/>
+                  <a:srgbClr val="BAC2DE"/>
                 </a:solidFill>
                 <a:latin typeface="Consolas"/>
               </a:rPr>
@@ -3911,7 +3912,7 @@
             <a:r>
               <a:rPr sz="1600">
                 <a:solidFill>
-                  <a:srgbClr val="EEFFFF"/>
+                  <a:srgbClr val="BAC2DE"/>
                 </a:solidFill>
                 <a:latin typeface="Consolas"/>
               </a:rPr>
@@ -3978,7 +3979,7 @@
             <a:r>
               <a:rPr sz="1600">
                 <a:solidFill>
-                  <a:srgbClr val="EEFFFF"/>
+                  <a:srgbClr val="BAC2DE"/>
                 </a:solidFill>
                 <a:latin typeface="Consolas"/>
               </a:rPr>
@@ -4244,7 +4245,7 @@
             <a:r>
               <a:rPr sz="1600">
                 <a:solidFill>
-                  <a:srgbClr val="EEFFFF"/>
+                  <a:srgbClr val="BAC2DE"/>
                 </a:solidFill>
                 <a:latin typeface="Consolas"/>
               </a:rPr>
@@ -4530,7 +4531,7 @@
             <a:r>
               <a:rPr sz="1600">
                 <a:solidFill>
-                  <a:srgbClr val="EEFFFF"/>
+                  <a:srgbClr val="BAC2DE"/>
                 </a:solidFill>
                 <a:latin typeface="Consolas"/>
               </a:rPr>
@@ -4606,7 +4607,7 @@
             <a:r>
               <a:rPr sz="1600">
                 <a:solidFill>
-                  <a:srgbClr val="EEFFFF"/>
+                  <a:srgbClr val="BAC2DE"/>
                 </a:solidFill>
                 <a:latin typeface="Consolas"/>
               </a:rPr>
@@ -5177,7 +5178,7 @@
             <a:r>
               <a:rPr sz="1600">
                 <a:solidFill>
-                  <a:srgbClr val="EEFFFF"/>
+                  <a:srgbClr val="BAC2DE"/>
                 </a:solidFill>
                 <a:latin typeface="Consolas"/>
               </a:rPr>
@@ -5240,7 +5241,7 @@
             <a:r>
               <a:rPr sz="1600">
                 <a:solidFill>
-                  <a:srgbClr val="EEFFFF"/>
+                  <a:srgbClr val="BAC2DE"/>
                 </a:solidFill>
                 <a:latin typeface="Consolas"/>
               </a:rPr>
@@ -5294,7 +5295,7 @@
             <a:r>
               <a:rPr sz="1600">
                 <a:solidFill>
-                  <a:srgbClr val="EEFFFF"/>
+                  <a:srgbClr val="BAC2DE"/>
                 </a:solidFill>
                 <a:latin typeface="Consolas"/>
               </a:rPr>
@@ -5375,7 +5376,7 @@
             <a:r>
               <a:rPr sz="1600">
                 <a:solidFill>
-                  <a:srgbClr val="EEFFFF"/>
+                  <a:srgbClr val="BAC2DE"/>
                 </a:solidFill>
                 <a:latin typeface="Consolas"/>
               </a:rPr>
@@ -5464,7 +5465,7 @@
             <a:r>
               <a:rPr sz="1600">
                 <a:solidFill>
-                  <a:srgbClr val="EEFFFF"/>
+                  <a:srgbClr val="BAC2DE"/>
                 </a:solidFill>
                 <a:latin typeface="Consolas"/>
               </a:rPr>
@@ -5652,7 +5653,7 @@
             <a:r>
               <a:rPr sz="1600">
                 <a:solidFill>
-                  <a:srgbClr val="EEFFFF"/>
+                  <a:srgbClr val="BAC2DE"/>
                 </a:solidFill>
                 <a:latin typeface="Consolas"/>
               </a:rPr>
@@ -6122,7 +6123,7 @@
             <a:r>
               <a:rPr sz="1600">
                 <a:solidFill>
-                  <a:srgbClr val="EEFFFF"/>
+                  <a:srgbClr val="BAC2DE"/>
                 </a:solidFill>
                 <a:latin typeface="Consolas"/>
               </a:rPr>
@@ -6176,7 +6177,7 @@
             <a:r>
               <a:rPr sz="1600">
                 <a:solidFill>
-                  <a:srgbClr val="EEFFFF"/>
+                  <a:srgbClr val="BAC2DE"/>
                 </a:solidFill>
                 <a:latin typeface="Consolas"/>
               </a:rPr>
@@ -6292,7 +6293,7 @@
             <a:r>
               <a:rPr sz="1600">
                 <a:solidFill>
-                  <a:srgbClr val="EEFFFF"/>
+                  <a:srgbClr val="BAC2DE"/>
                 </a:solidFill>
                 <a:latin typeface="Consolas"/>
               </a:rPr>
@@ -6592,7 +6593,7 @@
             <a:r>
               <a:rPr sz="1600">
                 <a:solidFill>
-                  <a:srgbClr val="EEFFFF"/>
+                  <a:srgbClr val="BAC2DE"/>
                 </a:solidFill>
                 <a:latin typeface="Consolas"/>
               </a:rPr>
@@ -6752,182 +6753,11 @@
             <a:r>
               <a:rPr sz="1600">
                 <a:solidFill>
-                  <a:srgbClr val="C792EA"/>
-                </a:solidFill>
-                <a:latin typeface="Consolas"/>
-              </a:rPr>
-              <a:t>fn</a:t>
-            </a:r>
-            <a:r>
-              <a:rPr sz="1600">
-                <a:solidFill>
-                  <a:srgbClr val="EEFFFF"/>
-                </a:solidFill>
-                <a:latin typeface="Consolas"/>
-              </a:rPr>
-              <a:t> </a:t>
-            </a:r>
-            <a:r>
-              <a:rPr sz="1600">
-                <a:solidFill>
-                  <a:srgbClr val="82AAFF"/>
-                </a:solidFill>
-                <a:latin typeface="Consolas"/>
-              </a:rPr>
-              <a:t>main</a:t>
-            </a:r>
-            <a:r>
-              <a:rPr sz="1600">
-                <a:solidFill>
-                  <a:srgbClr val="BAC2DE"/>
-                </a:solidFill>
-                <a:latin typeface="Consolas"/>
-              </a:rPr>
-              <a:t>(</a:t>
-            </a:r>
-            <a:r>
-              <a:rPr sz="1600">
-                <a:solidFill>
-                  <a:srgbClr val="BAC2DE"/>
-                </a:solidFill>
-                <a:latin typeface="Consolas"/>
-              </a:rPr>
-              <a:t>)</a:t>
-            </a:r>
-            <a:r>
-              <a:rPr sz="1600">
-                <a:solidFill>
-                  <a:srgbClr val="EEFFFF"/>
-                </a:solidFill>
-                <a:latin typeface="Consolas"/>
-              </a:rPr>
-              <a:t> </a:t>
-            </a:r>
-            <a:r>
-              <a:rPr sz="1600">
-                <a:solidFill>
-                  <a:srgbClr val="EEFFFF"/>
-                </a:solidFill>
-                <a:latin typeface="Consolas"/>
-              </a:rPr>
-              <a:t>-&gt;</a:t>
-            </a:r>
-            <a:r>
-              <a:rPr sz="1600">
-                <a:solidFill>
-                  <a:srgbClr val="EEFFFF"/>
-                </a:solidFill>
-                <a:latin typeface="Consolas"/>
-              </a:rPr>
-              <a:t> </a:t>
-            </a:r>
-            <a:r>
-              <a:rPr sz="1600">
-                <a:solidFill>
-                  <a:srgbClr val="89DDFF"/>
-                </a:solidFill>
-                <a:latin typeface="Consolas"/>
-              </a:rPr>
-              <a:t>Result</a:t>
-            </a:r>
-            <a:r>
-              <a:rPr sz="1600">
-                <a:solidFill>
-                  <a:srgbClr val="89DDFF"/>
-                </a:solidFill>
-                <a:latin typeface="Consolas"/>
-              </a:rPr>
-              <a:t>&lt;</a:t>
-            </a:r>
-            <a:r>
-              <a:rPr sz="1600">
-                <a:solidFill>
-                  <a:srgbClr val="BAC2DE"/>
-                </a:solidFill>
-                <a:latin typeface="Consolas"/>
-              </a:rPr>
-              <a:t>(</a:t>
-            </a:r>
-            <a:r>
-              <a:rPr sz="1600">
-                <a:solidFill>
-                  <a:srgbClr val="BAC2DE"/>
-                </a:solidFill>
-                <a:latin typeface="Consolas"/>
-              </a:rPr>
-              <a:t>)</a:t>
-            </a:r>
-            <a:r>
-              <a:rPr sz="1600">
-                <a:solidFill>
-                  <a:srgbClr val="BAC2DE"/>
-                </a:solidFill>
-                <a:latin typeface="Consolas"/>
-              </a:rPr>
-              <a:t>,</a:t>
-            </a:r>
-            <a:r>
-              <a:rPr sz="1600">
-                <a:solidFill>
-                  <a:srgbClr val="EEFFFF"/>
-                </a:solidFill>
-                <a:latin typeface="Consolas"/>
-              </a:rPr>
-              <a:t> </a:t>
-            </a:r>
-            <a:r>
-              <a:rPr sz="1600">
-                <a:solidFill>
-                  <a:srgbClr val="EEFFFF"/>
-                </a:solidFill>
-                <a:latin typeface="Consolas"/>
-              </a:rPr>
-              <a:t>postcard</a:t>
-            </a:r>
-            <a:r>
-              <a:rPr sz="1600">
-                <a:solidFill>
-                  <a:srgbClr val="EEFFFF"/>
-                </a:solidFill>
-                <a:latin typeface="Consolas"/>
-              </a:rPr>
-              <a:t>::</a:t>
-            </a:r>
-            <a:r>
-              <a:rPr sz="1600">
-                <a:solidFill>
-                  <a:srgbClr val="EEFFFF"/>
-                </a:solidFill>
-                <a:latin typeface="Consolas"/>
-              </a:rPr>
-              <a:t>Error</a:t>
-            </a:r>
-            <a:r>
-              <a:rPr sz="1600">
-                <a:solidFill>
-                  <a:srgbClr val="89DDFF"/>
-                </a:solidFill>
-                <a:latin typeface="Consolas"/>
-              </a:rPr>
-              <a:t>&gt;</a:t>
-            </a:r>
-            <a:r>
-              <a:rPr sz="1600">
-                <a:solidFill>
-                  <a:srgbClr val="EEFFFF"/>
-                </a:solidFill>
-                <a:latin typeface="Consolas"/>
-              </a:rPr>
-              <a:t> </a:t>
-            </a:r>
-            <a:r>
-              <a:rPr sz="1600">
-                <a:solidFill>
-                  <a:srgbClr val="BAC2DE"/>
-                </a:solidFill>
-                <a:latin typeface="Consolas"/>
-              </a:rPr>
-              <a:t>{</a:t>
+                  <a:srgbClr val="6A9955"/>
+                </a:solidFill>
+                <a:latin typeface="Consolas"/>
+              </a:rPr>
+              <a:t>// TECHNIQUE NAME: method-level gating.</a:t>
             </a:r>
           </a:p>
           <a:p>
@@ -6942,141 +6772,6 @@
                 <a:spcPts val="0"/>
               </a:spcAft>
             </a:pPr>
-            <a:r>
-              <a:rPr sz="1600">
-                <a:solidFill>
-                  <a:srgbClr val="EEFFFF"/>
-                </a:solidFill>
-                <a:latin typeface="Consolas"/>
-              </a:rPr>
-              <a:t>    </a:t>
-            </a:r>
-            <a:r>
-              <a:rPr sz="1600">
-                <a:solidFill>
-                  <a:srgbClr val="C792EA"/>
-                </a:solidFill>
-                <a:latin typeface="Consolas"/>
-              </a:rPr>
-              <a:t>let</a:t>
-            </a:r>
-            <a:r>
-              <a:rPr sz="1600">
-                <a:solidFill>
-                  <a:srgbClr val="EEFFFF"/>
-                </a:solidFill>
-                <a:latin typeface="Consolas"/>
-              </a:rPr>
-              <a:t> </a:t>
-            </a:r>
-            <a:r>
-              <a:rPr sz="1600">
-                <a:solidFill>
-                  <a:srgbClr val="C792EA"/>
-                </a:solidFill>
-                <a:latin typeface="Consolas"/>
-              </a:rPr>
-              <a:t>mut</a:t>
-            </a:r>
-            <a:r>
-              <a:rPr sz="1600">
-                <a:solidFill>
-                  <a:srgbClr val="EEFFFF"/>
-                </a:solidFill>
-                <a:latin typeface="Consolas"/>
-              </a:rPr>
-              <a:t> </a:t>
-            </a:r>
-            <a:r>
-              <a:rPr sz="1600">
-                <a:solidFill>
-                  <a:srgbClr val="EEFFFF"/>
-                </a:solidFill>
-                <a:latin typeface="Consolas"/>
-              </a:rPr>
-              <a:t>flash</a:t>
-            </a:r>
-            <a:r>
-              <a:rPr sz="1600">
-                <a:solidFill>
-                  <a:srgbClr val="EEFFFF"/>
-                </a:solidFill>
-                <a:latin typeface="Consolas"/>
-              </a:rPr>
-              <a:t> </a:t>
-            </a:r>
-            <a:r>
-              <a:rPr sz="1600">
-                <a:solidFill>
-                  <a:srgbClr val="89DDFF"/>
-                </a:solidFill>
-                <a:latin typeface="Consolas"/>
-              </a:rPr>
-              <a:t>=</a:t>
-            </a:r>
-            <a:r>
-              <a:rPr sz="1600">
-                <a:solidFill>
-                  <a:srgbClr val="EEFFFF"/>
-                </a:solidFill>
-                <a:latin typeface="Consolas"/>
-              </a:rPr>
-              <a:t> </a:t>
-            </a:r>
-            <a:r>
-              <a:rPr sz="1600">
-                <a:solidFill>
-                  <a:srgbClr val="EEFFFF"/>
-                </a:solidFill>
-                <a:latin typeface="Consolas"/>
-              </a:rPr>
-              <a:t>FlashBlock</a:t>
-            </a:r>
-            <a:r>
-              <a:rPr sz="1600">
-                <a:solidFill>
-                  <a:srgbClr val="EEFFFF"/>
-                </a:solidFill>
-                <a:latin typeface="Consolas"/>
-              </a:rPr>
-              <a:t>::</a:t>
-            </a:r>
-            <a:r>
-              <a:rPr sz="1600">
-                <a:solidFill>
-                  <a:srgbClr val="EEFFFF"/>
-                </a:solidFill>
-                <a:latin typeface="Consolas"/>
-              </a:rPr>
-              <a:t>new</a:t>
-            </a:r>
-            <a:r>
-              <a:rPr sz="1600">
-                <a:solidFill>
-                  <a:srgbClr val="BAC2DE"/>
-                </a:solidFill>
-                <a:latin typeface="Consolas"/>
-              </a:rPr>
-              <a:t>(</a:t>
-            </a:r>
-            <a:r>
-              <a:rPr sz="1600">
-                <a:solidFill>
-                  <a:srgbClr val="BAC2DE"/>
-                </a:solidFill>
-                <a:latin typeface="Consolas"/>
-              </a:rPr>
-              <a:t>)</a:t>
-            </a:r>
-            <a:r>
-              <a:rPr sz="1600">
-                <a:solidFill>
-                  <a:srgbClr val="BAC2DE"/>
-                </a:solidFill>
-                <a:latin typeface="Consolas"/>
-              </a:rPr>
-              <a:t>;</a:t>
-            </a:r>
           </a:p>
           <a:p>
             <a:pPr>
@@ -7090,6 +6785,186 @@
                 <a:spcPts val="0"/>
               </a:spcAft>
             </a:pPr>
+            <a:r>
+              <a:rPr sz="1600">
+                <a:solidFill>
+                  <a:srgbClr val="C792EA"/>
+                </a:solidFill>
+                <a:latin typeface="Consolas"/>
+              </a:rPr>
+              <a:t>fn</a:t>
+            </a:r>
+            <a:r>
+              <a:rPr sz="1600">
+                <a:solidFill>
+                  <a:srgbClr val="EEFFFF"/>
+                </a:solidFill>
+                <a:latin typeface="Consolas"/>
+              </a:rPr>
+              <a:t> </a:t>
+            </a:r>
+            <a:r>
+              <a:rPr sz="1600">
+                <a:solidFill>
+                  <a:srgbClr val="82AAFF"/>
+                </a:solidFill>
+                <a:latin typeface="Consolas"/>
+              </a:rPr>
+              <a:t>main</a:t>
+            </a:r>
+            <a:r>
+              <a:rPr sz="1600">
+                <a:solidFill>
+                  <a:srgbClr val="BAC2DE"/>
+                </a:solidFill>
+                <a:latin typeface="Consolas"/>
+              </a:rPr>
+              <a:t>(</a:t>
+            </a:r>
+            <a:r>
+              <a:rPr sz="1600">
+                <a:solidFill>
+                  <a:srgbClr val="BAC2DE"/>
+                </a:solidFill>
+                <a:latin typeface="Consolas"/>
+              </a:rPr>
+              <a:t>)</a:t>
+            </a:r>
+            <a:r>
+              <a:rPr sz="1600">
+                <a:solidFill>
+                  <a:srgbClr val="EEFFFF"/>
+                </a:solidFill>
+                <a:latin typeface="Consolas"/>
+              </a:rPr>
+              <a:t> </a:t>
+            </a:r>
+            <a:r>
+              <a:rPr sz="1600">
+                <a:solidFill>
+                  <a:srgbClr val="BAC2DE"/>
+                </a:solidFill>
+                <a:latin typeface="Consolas"/>
+              </a:rPr>
+              <a:t>-&gt;</a:t>
+            </a:r>
+            <a:r>
+              <a:rPr sz="1600">
+                <a:solidFill>
+                  <a:srgbClr val="EEFFFF"/>
+                </a:solidFill>
+                <a:latin typeface="Consolas"/>
+              </a:rPr>
+              <a:t> </a:t>
+            </a:r>
+            <a:r>
+              <a:rPr sz="1600">
+                <a:solidFill>
+                  <a:srgbClr val="89DDFF"/>
+                </a:solidFill>
+                <a:latin typeface="Consolas"/>
+              </a:rPr>
+              <a:t>Result</a:t>
+            </a:r>
+            <a:r>
+              <a:rPr sz="1600">
+                <a:solidFill>
+                  <a:srgbClr val="89DDFF"/>
+                </a:solidFill>
+                <a:latin typeface="Consolas"/>
+              </a:rPr>
+              <a:t>&lt;</a:t>
+            </a:r>
+            <a:r>
+              <a:rPr sz="1600">
+                <a:solidFill>
+                  <a:srgbClr val="BAC2DE"/>
+                </a:solidFill>
+                <a:latin typeface="Consolas"/>
+              </a:rPr>
+              <a:t>(</a:t>
+            </a:r>
+            <a:r>
+              <a:rPr sz="1600">
+                <a:solidFill>
+                  <a:srgbClr val="BAC2DE"/>
+                </a:solidFill>
+                <a:latin typeface="Consolas"/>
+              </a:rPr>
+              <a:t>)</a:t>
+            </a:r>
+            <a:r>
+              <a:rPr sz="1600">
+                <a:solidFill>
+                  <a:srgbClr val="BAC2DE"/>
+                </a:solidFill>
+                <a:latin typeface="Consolas"/>
+              </a:rPr>
+              <a:t>,</a:t>
+            </a:r>
+            <a:r>
+              <a:rPr sz="1600">
+                <a:solidFill>
+                  <a:srgbClr val="EEFFFF"/>
+                </a:solidFill>
+                <a:latin typeface="Consolas"/>
+              </a:rPr>
+              <a:t> </a:t>
+            </a:r>
+            <a:r>
+              <a:rPr sz="1600">
+                <a:solidFill>
+                  <a:srgbClr val="EEFFFF"/>
+                </a:solidFill>
+                <a:latin typeface="Consolas"/>
+              </a:rPr>
+              <a:t>postcard</a:t>
+            </a:r>
+            <a:r>
+              <a:rPr sz="1600">
+                <a:solidFill>
+                  <a:srgbClr val="BAC2DE"/>
+                </a:solidFill>
+                <a:latin typeface="Consolas"/>
+              </a:rPr>
+              <a:t>::</a:t>
+            </a:r>
+            <a:r>
+              <a:rPr sz="1600">
+                <a:solidFill>
+                  <a:srgbClr val="EEFFFF"/>
+                </a:solidFill>
+                <a:latin typeface="Consolas"/>
+              </a:rPr>
+              <a:t>Error</a:t>
+            </a:r>
+            <a:r>
+              <a:rPr sz="1600">
+                <a:solidFill>
+                  <a:srgbClr val="89DDFF"/>
+                </a:solidFill>
+                <a:latin typeface="Consolas"/>
+              </a:rPr>
+              <a:t>&gt;</a:t>
+            </a:r>
+            <a:r>
+              <a:rPr sz="1600">
+                <a:solidFill>
+                  <a:srgbClr val="EEFFFF"/>
+                </a:solidFill>
+                <a:latin typeface="Consolas"/>
+              </a:rPr>
+              <a:t> </a:t>
+            </a:r>
+            <a:r>
+              <a:rPr sz="1600">
+                <a:solidFill>
+                  <a:srgbClr val="BAC2DE"/>
+                </a:solidFill>
+                <a:latin typeface="Consolas"/>
+              </a:rPr>
+              <a:t>{</a:t>
+            </a:r>
           </a:p>
           <a:p>
             <a:pPr>
@@ -7133,11 +7008,11 @@
             <a:r>
               <a:rPr sz="1600">
                 <a:solidFill>
-                  <a:srgbClr val="EEFFFF"/>
-                </a:solidFill>
-                <a:latin typeface="Consolas"/>
-              </a:rPr>
-              <a:t>credentials</a:t>
+                  <a:srgbClr val="C792EA"/>
+                </a:solidFill>
+                <a:latin typeface="Consolas"/>
+              </a:rPr>
+              <a:t>mut</a:t>
             </a:r>
             <a:r>
               <a:rPr sz="1600">
@@ -7151,6 +7026,24 @@
             <a:r>
               <a:rPr sz="1600">
                 <a:solidFill>
+                  <a:srgbClr val="EEFFFF"/>
+                </a:solidFill>
+                <a:latin typeface="Consolas"/>
+              </a:rPr>
+              <a:t>flash</a:t>
+            </a:r>
+            <a:r>
+              <a:rPr sz="1600">
+                <a:solidFill>
+                  <a:srgbClr val="EEFFFF"/>
+                </a:solidFill>
+                <a:latin typeface="Consolas"/>
+              </a:rPr>
+              <a:t> </a:t>
+            </a:r>
+            <a:r>
+              <a:rPr sz="1600">
+                <a:solidFill>
                   <a:srgbClr val="89DDFF"/>
                 </a:solidFill>
                 <a:latin typeface="Consolas"/>
@@ -7173,25 +7066,52 @@
                 </a:solidFill>
                 <a:latin typeface="Consolas"/>
               </a:rPr>
-              <a:t>WifiCredentials</a:t>
-            </a:r>
-            <a:r>
-              <a:rPr sz="1600">
-                <a:solidFill>
-                  <a:srgbClr val="EEFFFF"/>
-                </a:solidFill>
-                <a:latin typeface="Consolas"/>
-              </a:rPr>
-              <a:t> </a:t>
-            </a:r>
-            <a:r>
-              <a:rPr sz="1600">
-                <a:solidFill>
-                  <a:srgbClr val="BAC2DE"/>
-                </a:solidFill>
-                <a:latin typeface="Consolas"/>
-              </a:rPr>
-              <a:t>{</a:t>
+              <a:t>FlashBlock</a:t>
+            </a:r>
+            <a:r>
+              <a:rPr sz="1600">
+                <a:solidFill>
+                  <a:srgbClr val="BAC2DE"/>
+                </a:solidFill>
+                <a:latin typeface="Consolas"/>
+              </a:rPr>
+              <a:t>::</a:t>
+            </a:r>
+            <a:r>
+              <a:rPr sz="1600">
+                <a:solidFill>
+                  <a:srgbClr val="EEFFFF"/>
+                </a:solidFill>
+                <a:latin typeface="Consolas"/>
+              </a:rPr>
+              <a:t>new</a:t>
+            </a:r>
+            <a:r>
+              <a:rPr sz="1600">
+                <a:solidFill>
+                  <a:srgbClr val="BAC2DE"/>
+                </a:solidFill>
+                <a:latin typeface="Consolas"/>
+              </a:rPr>
+              <a:t>(</a:t>
+            </a:r>
+            <a:r>
+              <a:rPr sz="1600">
+                <a:solidFill>
+                  <a:srgbClr val="BAC2DE"/>
+                </a:solidFill>
+                <a:latin typeface="Consolas"/>
+              </a:rPr>
+              <a:t>)</a:t>
+            </a:r>
+            <a:r>
+              <a:rPr sz="1600">
+                <a:solidFill>
+                  <a:srgbClr val="BAC2DE"/>
+                </a:solidFill>
+                <a:latin typeface="Consolas"/>
+              </a:rPr>
+              <a:t>;</a:t>
             </a:r>
           </a:p>
           <a:p>
@@ -7206,114 +7126,6 @@
                 <a:spcPts val="0"/>
               </a:spcAft>
             </a:pPr>
-            <a:r>
-              <a:rPr sz="1600">
-                <a:solidFill>
-                  <a:srgbClr val="EEFFFF"/>
-                </a:solidFill>
-                <a:latin typeface="Consolas"/>
-              </a:rPr>
-              <a:t>        </a:t>
-            </a:r>
-            <a:r>
-              <a:rPr sz="1600">
-                <a:solidFill>
-                  <a:srgbClr val="EEFFFF"/>
-                </a:solidFill>
-                <a:latin typeface="Consolas"/>
-              </a:rPr>
-              <a:t>ssid</a:t>
-            </a:r>
-            <a:r>
-              <a:rPr sz="1600">
-                <a:solidFill>
-                  <a:srgbClr val="EEFFFF"/>
-                </a:solidFill>
-                <a:latin typeface="Consolas"/>
-              </a:rPr>
-              <a:t>:</a:t>
-            </a:r>
-            <a:r>
-              <a:rPr sz="1600">
-                <a:solidFill>
-                  <a:srgbClr val="EEFFFF"/>
-                </a:solidFill>
-                <a:latin typeface="Consolas"/>
-              </a:rPr>
-              <a:t> </a:t>
-            </a:r>
-            <a:r>
-              <a:rPr sz="1600">
-                <a:solidFill>
-                  <a:srgbClr val="C3E88D"/>
-                </a:solidFill>
-                <a:latin typeface="Consolas"/>
-              </a:rPr>
-              <a:t>"</a:t>
-            </a:r>
-            <a:r>
-              <a:rPr sz="1600">
-                <a:solidFill>
-                  <a:srgbClr val="C3E88D"/>
-                </a:solidFill>
-                <a:latin typeface="Consolas"/>
-              </a:rPr>
-              <a:t>HomeWiFi</a:t>
-            </a:r>
-            <a:r>
-              <a:rPr sz="1600">
-                <a:solidFill>
-                  <a:srgbClr val="C3E88D"/>
-                </a:solidFill>
-                <a:latin typeface="Consolas"/>
-              </a:rPr>
-              <a:t>"</a:t>
-            </a:r>
-            <a:r>
-              <a:rPr sz="1600">
-                <a:solidFill>
-                  <a:srgbClr val="BAC2DE"/>
-                </a:solidFill>
-                <a:latin typeface="Consolas"/>
-              </a:rPr>
-              <a:t>.</a:t>
-            </a:r>
-            <a:r>
-              <a:rPr sz="1600">
-                <a:solidFill>
-                  <a:srgbClr val="EEFFFF"/>
-                </a:solidFill>
-                <a:latin typeface="Consolas"/>
-              </a:rPr>
-              <a:t>to_string</a:t>
-            </a:r>
-            <a:r>
-              <a:rPr sz="1600">
-                <a:solidFill>
-                  <a:srgbClr val="BAC2DE"/>
-                </a:solidFill>
-                <a:latin typeface="Consolas"/>
-              </a:rPr>
-              <a:t>(</a:t>
-            </a:r>
-            <a:r>
-              <a:rPr sz="1600">
-                <a:solidFill>
-                  <a:srgbClr val="BAC2DE"/>
-                </a:solidFill>
-                <a:latin typeface="Consolas"/>
-              </a:rPr>
-              <a:t>)</a:t>
-            </a:r>
-            <a:r>
-              <a:rPr sz="1600">
-                <a:solidFill>
-                  <a:srgbClr val="BAC2DE"/>
-                </a:solidFill>
-                <a:latin typeface="Consolas"/>
-              </a:rPr>
-              <a:t>,</a:t>
-            </a:r>
           </a:p>
           <a:p>
             <a:pPr>
@@ -7334,25 +7146,16 @@
                 </a:solidFill>
                 <a:latin typeface="Consolas"/>
               </a:rPr>
-              <a:t>        </a:t>
-            </a:r>
-            <a:r>
-              <a:rPr sz="1600">
-                <a:solidFill>
-                  <a:srgbClr val="EEFFFF"/>
-                </a:solidFill>
-                <a:latin typeface="Consolas"/>
-              </a:rPr>
-              <a:t>password</a:t>
-            </a:r>
-            <a:r>
-              <a:rPr sz="1600">
-                <a:solidFill>
-                  <a:srgbClr val="EEFFFF"/>
-                </a:solidFill>
-                <a:latin typeface="Consolas"/>
-              </a:rPr>
-              <a:t>:</a:t>
+              <a:t>    </a:t>
+            </a:r>
+            <a:r>
+              <a:rPr sz="1600">
+                <a:solidFill>
+                  <a:srgbClr val="C792EA"/>
+                </a:solidFill>
+                <a:latin typeface="Consolas"/>
+              </a:rPr>
+              <a:t>let</a:t>
             </a:r>
             <a:r>
               <a:rPr sz="1600">
@@ -7366,74 +7169,65 @@
             <a:r>
               <a:rPr sz="1600">
                 <a:solidFill>
-                  <a:srgbClr val="C3E88D"/>
-                </a:solidFill>
-                <a:latin typeface="Consolas"/>
-              </a:rPr>
-              <a:t>"</a:t>
-            </a:r>
-            <a:r>
-              <a:rPr sz="1600">
-                <a:solidFill>
-                  <a:srgbClr val="C3E88D"/>
-                </a:solidFill>
-                <a:latin typeface="Consolas"/>
-              </a:rPr>
-              <a:t>secret</a:t>
-            </a:r>
-            <a:r>
-              <a:rPr sz="1600">
-                <a:solidFill>
-                  <a:srgbClr val="C3E88D"/>
-                </a:solidFill>
-                <a:latin typeface="Consolas"/>
-              </a:rPr>
-              <a:t>"</a:t>
-            </a:r>
-            <a:r>
-              <a:rPr sz="1600">
-                <a:solidFill>
-                  <a:srgbClr val="BAC2DE"/>
-                </a:solidFill>
-                <a:latin typeface="Consolas"/>
-              </a:rPr>
-              <a:t>.</a:t>
-            </a:r>
-            <a:r>
-              <a:rPr sz="1600">
-                <a:solidFill>
-                  <a:srgbClr val="EEFFFF"/>
-                </a:solidFill>
-                <a:latin typeface="Consolas"/>
-              </a:rPr>
-              <a:t>to_string</a:t>
-            </a:r>
-            <a:r>
-              <a:rPr sz="1600">
-                <a:solidFill>
-                  <a:srgbClr val="BAC2DE"/>
-                </a:solidFill>
-                <a:latin typeface="Consolas"/>
-              </a:rPr>
-              <a:t>(</a:t>
-            </a:r>
-            <a:r>
-              <a:rPr sz="1600">
-                <a:solidFill>
-                  <a:srgbClr val="BAC2DE"/>
-                </a:solidFill>
-                <a:latin typeface="Consolas"/>
-              </a:rPr>
-              <a:t>)</a:t>
-            </a:r>
-            <a:r>
-              <a:rPr sz="1600">
-                <a:solidFill>
-                  <a:srgbClr val="BAC2DE"/>
-                </a:solidFill>
-                <a:latin typeface="Consolas"/>
-              </a:rPr>
-              <a:t>,</a:t>
+                  <a:srgbClr val="EEFFFF"/>
+                </a:solidFill>
+                <a:latin typeface="Consolas"/>
+              </a:rPr>
+              <a:t>credentials</a:t>
+            </a:r>
+            <a:r>
+              <a:rPr sz="1600">
+                <a:solidFill>
+                  <a:srgbClr val="EEFFFF"/>
+                </a:solidFill>
+                <a:latin typeface="Consolas"/>
+              </a:rPr>
+              <a:t> </a:t>
+            </a:r>
+            <a:r>
+              <a:rPr sz="1600">
+                <a:solidFill>
+                  <a:srgbClr val="89DDFF"/>
+                </a:solidFill>
+                <a:latin typeface="Consolas"/>
+              </a:rPr>
+              <a:t>=</a:t>
+            </a:r>
+            <a:r>
+              <a:rPr sz="1600">
+                <a:solidFill>
+                  <a:srgbClr val="EEFFFF"/>
+                </a:solidFill>
+                <a:latin typeface="Consolas"/>
+              </a:rPr>
+              <a:t> </a:t>
+            </a:r>
+            <a:r>
+              <a:rPr sz="1600">
+                <a:solidFill>
+                  <a:srgbClr val="EEFFFF"/>
+                </a:solidFill>
+                <a:latin typeface="Consolas"/>
+              </a:rPr>
+              <a:t>WifiCredentials</a:t>
+            </a:r>
+            <a:r>
+              <a:rPr sz="1600">
+                <a:solidFill>
+                  <a:srgbClr val="EEFFFF"/>
+                </a:solidFill>
+                <a:latin typeface="Consolas"/>
+              </a:rPr>
+              <a:t> </a:t>
+            </a:r>
+            <a:r>
+              <a:rPr sz="1600">
+                <a:solidFill>
+                  <a:srgbClr val="BAC2DE"/>
+                </a:solidFill>
+                <a:latin typeface="Consolas"/>
+              </a:rPr>
+              <a:t>{</a:t>
             </a:r>
           </a:p>
         </p:txBody>
@@ -7539,25 +7333,106 @@
                 </a:solidFill>
                 <a:latin typeface="Consolas"/>
               </a:rPr>
-              <a:t>    </a:t>
-            </a:r>
-            <a:r>
-              <a:rPr sz="1600">
-                <a:solidFill>
-                  <a:srgbClr val="BAC2DE"/>
-                </a:solidFill>
-                <a:latin typeface="Consolas"/>
-              </a:rPr>
-              <a:t>}</a:t>
-            </a:r>
-            <a:r>
-              <a:rPr sz="1600">
-                <a:solidFill>
-                  <a:srgbClr val="BAC2DE"/>
-                </a:solidFill>
-                <a:latin typeface="Consolas"/>
-              </a:rPr>
-              <a:t>;</a:t>
+              <a:t>        </a:t>
+            </a:r>
+            <a:r>
+              <a:rPr sz="1600">
+                <a:solidFill>
+                  <a:srgbClr val="EEFFFF"/>
+                </a:solidFill>
+                <a:latin typeface="Consolas"/>
+              </a:rPr>
+              <a:t>ssid</a:t>
+            </a:r>
+            <a:r>
+              <a:rPr sz="1600">
+                <a:solidFill>
+                  <a:srgbClr val="BAC2DE"/>
+                </a:solidFill>
+                <a:latin typeface="Consolas"/>
+              </a:rPr>
+              <a:t>:</a:t>
+            </a:r>
+            <a:r>
+              <a:rPr sz="1600">
+                <a:solidFill>
+                  <a:srgbClr val="EEFFFF"/>
+                </a:solidFill>
+                <a:latin typeface="Consolas"/>
+              </a:rPr>
+              <a:t> </a:t>
+            </a:r>
+            <a:r>
+              <a:rPr sz="1600">
+                <a:solidFill>
+                  <a:srgbClr val="C3E88D"/>
+                </a:solidFill>
+                <a:latin typeface="Consolas"/>
+              </a:rPr>
+              <a:t>"</a:t>
+            </a:r>
+            <a:r>
+              <a:rPr sz="1600">
+                <a:solidFill>
+                  <a:srgbClr val="C3E88D"/>
+                </a:solidFill>
+                <a:latin typeface="Consolas"/>
+              </a:rPr>
+              <a:t>HomeWiFi</a:t>
+            </a:r>
+            <a:r>
+              <a:rPr sz="1600">
+                <a:solidFill>
+                  <a:srgbClr val="C3E88D"/>
+                </a:solidFill>
+                <a:latin typeface="Consolas"/>
+              </a:rPr>
+              <a:t>"</a:t>
+            </a:r>
+            <a:r>
+              <a:rPr sz="1600">
+                <a:solidFill>
+                  <a:srgbClr val="BAC2DE"/>
+                </a:solidFill>
+                <a:latin typeface="Consolas"/>
+              </a:rPr>
+              <a:t>.</a:t>
+            </a:r>
+            <a:r>
+              <a:rPr sz="1600">
+                <a:solidFill>
+                  <a:srgbClr val="EEFFFF"/>
+                </a:solidFill>
+                <a:latin typeface="Consolas"/>
+              </a:rPr>
+              <a:t>to_string</a:t>
+            </a:r>
+            <a:r>
+              <a:rPr sz="1600">
+                <a:solidFill>
+                  <a:srgbClr val="BAC2DE"/>
+                </a:solidFill>
+                <a:latin typeface="Consolas"/>
+              </a:rPr>
+              <a:t>(</a:t>
+            </a:r>
+            <a:r>
+              <a:rPr sz="1600">
+                <a:solidFill>
+                  <a:srgbClr val="BAC2DE"/>
+                </a:solidFill>
+                <a:latin typeface="Consolas"/>
+              </a:rPr>
+              <a:t>)</a:t>
+            </a:r>
+            <a:r>
+              <a:rPr sz="1600">
+                <a:solidFill>
+                  <a:srgbClr val="BAC2DE"/>
+                </a:solidFill>
+                <a:latin typeface="Consolas"/>
+              </a:rPr>
+              <a:t>,</a:t>
             </a:r>
           </a:p>
           <a:p>
@@ -7572,6 +7447,114 @@
                 <a:spcPts val="0"/>
               </a:spcAft>
             </a:pPr>
+            <a:r>
+              <a:rPr sz="1600">
+                <a:solidFill>
+                  <a:srgbClr val="EEFFFF"/>
+                </a:solidFill>
+                <a:latin typeface="Consolas"/>
+              </a:rPr>
+              <a:t>        </a:t>
+            </a:r>
+            <a:r>
+              <a:rPr sz="1600">
+                <a:solidFill>
+                  <a:srgbClr val="EEFFFF"/>
+                </a:solidFill>
+                <a:latin typeface="Consolas"/>
+              </a:rPr>
+              <a:t>password</a:t>
+            </a:r>
+            <a:r>
+              <a:rPr sz="1600">
+                <a:solidFill>
+                  <a:srgbClr val="BAC2DE"/>
+                </a:solidFill>
+                <a:latin typeface="Consolas"/>
+              </a:rPr>
+              <a:t>:</a:t>
+            </a:r>
+            <a:r>
+              <a:rPr sz="1600">
+                <a:solidFill>
+                  <a:srgbClr val="EEFFFF"/>
+                </a:solidFill>
+                <a:latin typeface="Consolas"/>
+              </a:rPr>
+              <a:t> </a:t>
+            </a:r>
+            <a:r>
+              <a:rPr sz="1600">
+                <a:solidFill>
+                  <a:srgbClr val="C3E88D"/>
+                </a:solidFill>
+                <a:latin typeface="Consolas"/>
+              </a:rPr>
+              <a:t>"</a:t>
+            </a:r>
+            <a:r>
+              <a:rPr sz="1600">
+                <a:solidFill>
+                  <a:srgbClr val="C3E88D"/>
+                </a:solidFill>
+                <a:latin typeface="Consolas"/>
+              </a:rPr>
+              <a:t>secret</a:t>
+            </a:r>
+            <a:r>
+              <a:rPr sz="1600">
+                <a:solidFill>
+                  <a:srgbClr val="C3E88D"/>
+                </a:solidFill>
+                <a:latin typeface="Consolas"/>
+              </a:rPr>
+              <a:t>"</a:t>
+            </a:r>
+            <a:r>
+              <a:rPr sz="1600">
+                <a:solidFill>
+                  <a:srgbClr val="BAC2DE"/>
+                </a:solidFill>
+                <a:latin typeface="Consolas"/>
+              </a:rPr>
+              <a:t>.</a:t>
+            </a:r>
+            <a:r>
+              <a:rPr sz="1600">
+                <a:solidFill>
+                  <a:srgbClr val="EEFFFF"/>
+                </a:solidFill>
+                <a:latin typeface="Consolas"/>
+              </a:rPr>
+              <a:t>to_string</a:t>
+            </a:r>
+            <a:r>
+              <a:rPr sz="1600">
+                <a:solidFill>
+                  <a:srgbClr val="BAC2DE"/>
+                </a:solidFill>
+                <a:latin typeface="Consolas"/>
+              </a:rPr>
+              <a:t>(</a:t>
+            </a:r>
+            <a:r>
+              <a:rPr sz="1600">
+                <a:solidFill>
+                  <a:srgbClr val="BAC2DE"/>
+                </a:solidFill>
+                <a:latin typeface="Consolas"/>
+              </a:rPr>
+              <a:t>)</a:t>
+            </a:r>
+            <a:r>
+              <a:rPr sz="1600">
+                <a:solidFill>
+                  <a:srgbClr val="BAC2DE"/>
+                </a:solidFill>
+                <a:latin typeface="Consolas"/>
+              </a:rPr>
+              <a:t>,</a:t>
+            </a:r>
           </a:p>
           <a:p>
             <a:pPr>
@@ -7597,11 +7580,20 @@
             <a:r>
               <a:rPr sz="1600">
                 <a:solidFill>
-                  <a:srgbClr val="6A9955"/>
-                </a:solidFill>
-                <a:latin typeface="Consolas"/>
-              </a:rPr>
-              <a:t>// Works: WifiCredentials satisfies Serialize + Deserialize.</a:t>
+                  <a:srgbClr val="BAC2DE"/>
+                </a:solidFill>
+                <a:latin typeface="Consolas"/>
+              </a:rPr>
+              <a:t>}</a:t>
+            </a:r>
+            <a:r>
+              <a:rPr sz="1600">
+                <a:solidFill>
+                  <a:srgbClr val="BAC2DE"/>
+                </a:solidFill>
+                <a:latin typeface="Consolas"/>
+              </a:rPr>
+              <a:t>;</a:t>
             </a:r>
           </a:p>
           <a:p>
@@ -7616,141 +7608,6 @@
                 <a:spcPts val="0"/>
               </a:spcAft>
             </a:pPr>
-            <a:r>
-              <a:rPr sz="1600">
-                <a:solidFill>
-                  <a:srgbClr val="EEFFFF"/>
-                </a:solidFill>
-                <a:latin typeface="Consolas"/>
-              </a:rPr>
-              <a:t>    </a:t>
-            </a:r>
-            <a:r>
-              <a:rPr sz="1600">
-                <a:solidFill>
-                  <a:srgbClr val="EEFFFF"/>
-                </a:solidFill>
-                <a:latin typeface="Consolas"/>
-              </a:rPr>
-              <a:t>flash</a:t>
-            </a:r>
-            <a:r>
-              <a:rPr sz="1600">
-                <a:solidFill>
-                  <a:srgbClr val="BAC2DE"/>
-                </a:solidFill>
-                <a:latin typeface="Consolas"/>
-              </a:rPr>
-              <a:t>.</a:t>
-            </a:r>
-            <a:r>
-              <a:rPr sz="1600">
-                <a:solidFill>
-                  <a:srgbClr val="EEFFFF"/>
-                </a:solidFill>
-                <a:latin typeface="Consolas"/>
-              </a:rPr>
-              <a:t>save</a:t>
-            </a:r>
-            <a:r>
-              <a:rPr sz="1600">
-                <a:solidFill>
-                  <a:srgbClr val="BAC2DE"/>
-                </a:solidFill>
-                <a:latin typeface="Consolas"/>
-              </a:rPr>
-              <a:t>(</a:t>
-            </a:r>
-            <a:r>
-              <a:rPr sz="1600">
-                <a:solidFill>
-                  <a:srgbClr val="C3E88D"/>
-                </a:solidFill>
-                <a:latin typeface="Consolas"/>
-              </a:rPr>
-              <a:t>"</a:t>
-            </a:r>
-            <a:r>
-              <a:rPr sz="1600">
-                <a:solidFill>
-                  <a:srgbClr val="C3E88D"/>
-                </a:solidFill>
-                <a:latin typeface="Consolas"/>
-              </a:rPr>
-              <a:t>wifi</a:t>
-            </a:r>
-            <a:r>
-              <a:rPr sz="1600">
-                <a:solidFill>
-                  <a:srgbClr val="C3E88D"/>
-                </a:solidFill>
-                <a:latin typeface="Consolas"/>
-              </a:rPr>
-              <a:t>"</a:t>
-            </a:r>
-            <a:r>
-              <a:rPr sz="1600">
-                <a:solidFill>
-                  <a:srgbClr val="BAC2DE"/>
-                </a:solidFill>
-                <a:latin typeface="Consolas"/>
-              </a:rPr>
-              <a:t>,</a:t>
-            </a:r>
-            <a:r>
-              <a:rPr sz="1600">
-                <a:solidFill>
-                  <a:srgbClr val="EEFFFF"/>
-                </a:solidFill>
-                <a:latin typeface="Consolas"/>
-              </a:rPr>
-              <a:t> </a:t>
-            </a:r>
-            <a:r>
-              <a:rPr sz="1600">
-                <a:solidFill>
-                  <a:srgbClr val="89DDFF"/>
-                </a:solidFill>
-                <a:latin typeface="Consolas"/>
-              </a:rPr>
-              <a:t>&amp;</a:t>
-            </a:r>
-            <a:r>
-              <a:rPr sz="1600">
-                <a:solidFill>
-                  <a:srgbClr val="EEFFFF"/>
-                </a:solidFill>
-                <a:latin typeface="Consolas"/>
-              </a:rPr>
-              <a:t>credentials</a:t>
-            </a:r>
-            <a:r>
-              <a:rPr sz="1600">
-                <a:solidFill>
-                  <a:srgbClr val="BAC2DE"/>
-                </a:solidFill>
-                <a:latin typeface="Consolas"/>
-              </a:rPr>
-              <a:t>)</a:t>
-            </a:r>
-            <a:r>
-              <a:rPr sz="1600">
-                <a:solidFill>
-                  <a:srgbClr val="89DDFF"/>
-                </a:solidFill>
-                <a:latin typeface="Consolas"/>
-              </a:rPr>
-              <a:t>?</a:t>
-            </a:r>
-            <a:r>
-              <a:rPr sz="1600">
-                <a:solidFill>
-                  <a:srgbClr val="BAC2DE"/>
-                </a:solidFill>
-                <a:latin typeface="Consolas"/>
-              </a:rPr>
-              <a:t>;</a:t>
-            </a:r>
           </a:p>
           <a:p>
             <a:pPr>
@@ -7776,191 +7633,11 @@
             <a:r>
               <a:rPr sz="1600">
                 <a:solidFill>
-                  <a:srgbClr val="C792EA"/>
-                </a:solidFill>
-                <a:latin typeface="Consolas"/>
-              </a:rPr>
-              <a:t>let</a:t>
-            </a:r>
-            <a:r>
-              <a:rPr sz="1600">
-                <a:solidFill>
-                  <a:srgbClr val="EEFFFF"/>
-                </a:solidFill>
-                <a:latin typeface="Consolas"/>
-              </a:rPr>
-              <a:t> </a:t>
-            </a:r>
-            <a:r>
-              <a:rPr sz="1600">
-                <a:solidFill>
-                  <a:srgbClr val="EEFFFF"/>
-                </a:solidFill>
-                <a:latin typeface="Consolas"/>
-              </a:rPr>
-              <a:t>loaded</a:t>
-            </a:r>
-            <a:r>
-              <a:rPr sz="1600">
-                <a:solidFill>
-                  <a:srgbClr val="EEFFFF"/>
-                </a:solidFill>
-                <a:latin typeface="Consolas"/>
-              </a:rPr>
-              <a:t>:</a:t>
-            </a:r>
-            <a:r>
-              <a:rPr sz="1600">
-                <a:solidFill>
-                  <a:srgbClr val="EEFFFF"/>
-                </a:solidFill>
-                <a:latin typeface="Consolas"/>
-              </a:rPr>
-              <a:t> </a:t>
-            </a:r>
-            <a:r>
-              <a:rPr sz="1600">
-                <a:solidFill>
-                  <a:srgbClr val="89DDFF"/>
-                </a:solidFill>
-                <a:latin typeface="Consolas"/>
-              </a:rPr>
-              <a:t>Option</a:t>
-            </a:r>
-            <a:r>
-              <a:rPr sz="1600">
-                <a:solidFill>
-                  <a:srgbClr val="89DDFF"/>
-                </a:solidFill>
-                <a:latin typeface="Consolas"/>
-              </a:rPr>
-              <a:t>&lt;</a:t>
-            </a:r>
-            <a:r>
-              <a:rPr sz="1600">
-                <a:solidFill>
-                  <a:srgbClr val="EEFFFF"/>
-                </a:solidFill>
-                <a:latin typeface="Consolas"/>
-              </a:rPr>
-              <a:t>WifiCredentials</a:t>
-            </a:r>
-            <a:r>
-              <a:rPr sz="1600">
-                <a:solidFill>
-                  <a:srgbClr val="89DDFF"/>
-                </a:solidFill>
-                <a:latin typeface="Consolas"/>
-              </a:rPr>
-              <a:t>&gt;</a:t>
-            </a:r>
-            <a:r>
-              <a:rPr sz="1600">
-                <a:solidFill>
-                  <a:srgbClr val="EEFFFF"/>
-                </a:solidFill>
-                <a:latin typeface="Consolas"/>
-              </a:rPr>
-              <a:t> </a:t>
-            </a:r>
-            <a:r>
-              <a:rPr sz="1600">
-                <a:solidFill>
-                  <a:srgbClr val="89DDFF"/>
-                </a:solidFill>
-                <a:latin typeface="Consolas"/>
-              </a:rPr>
-              <a:t>=</a:t>
-            </a:r>
-            <a:r>
-              <a:rPr sz="1600">
-                <a:solidFill>
-                  <a:srgbClr val="EEFFFF"/>
-                </a:solidFill>
-                <a:latin typeface="Consolas"/>
-              </a:rPr>
-              <a:t> </a:t>
-            </a:r>
-            <a:r>
-              <a:rPr sz="1600">
-                <a:solidFill>
-                  <a:srgbClr val="EEFFFF"/>
-                </a:solidFill>
-                <a:latin typeface="Consolas"/>
-              </a:rPr>
-              <a:t>flash</a:t>
-            </a:r>
-            <a:r>
-              <a:rPr sz="1600">
-                <a:solidFill>
-                  <a:srgbClr val="BAC2DE"/>
-                </a:solidFill>
-                <a:latin typeface="Consolas"/>
-              </a:rPr>
-              <a:t>.</a:t>
-            </a:r>
-            <a:r>
-              <a:rPr sz="1600">
-                <a:solidFill>
-                  <a:srgbClr val="EEFFFF"/>
-                </a:solidFill>
-                <a:latin typeface="Consolas"/>
-              </a:rPr>
-              <a:t>load</a:t>
-            </a:r>
-            <a:r>
-              <a:rPr sz="1600">
-                <a:solidFill>
-                  <a:srgbClr val="BAC2DE"/>
-                </a:solidFill>
-                <a:latin typeface="Consolas"/>
-              </a:rPr>
-              <a:t>(</a:t>
-            </a:r>
-            <a:r>
-              <a:rPr sz="1600">
-                <a:solidFill>
-                  <a:srgbClr val="C3E88D"/>
-                </a:solidFill>
-                <a:latin typeface="Consolas"/>
-              </a:rPr>
-              <a:t>"</a:t>
-            </a:r>
-            <a:r>
-              <a:rPr sz="1600">
-                <a:solidFill>
-                  <a:srgbClr val="C3E88D"/>
-                </a:solidFill>
-                <a:latin typeface="Consolas"/>
-              </a:rPr>
-              <a:t>wifi</a:t>
-            </a:r>
-            <a:r>
-              <a:rPr sz="1600">
-                <a:solidFill>
-                  <a:srgbClr val="C3E88D"/>
-                </a:solidFill>
-                <a:latin typeface="Consolas"/>
-              </a:rPr>
-              <a:t>"</a:t>
-            </a:r>
-            <a:r>
-              <a:rPr sz="1600">
-                <a:solidFill>
-                  <a:srgbClr val="BAC2DE"/>
-                </a:solidFill>
-                <a:latin typeface="Consolas"/>
-              </a:rPr>
-              <a:t>)</a:t>
-            </a:r>
-            <a:r>
-              <a:rPr sz="1600">
-                <a:solidFill>
-                  <a:srgbClr val="BAC2DE"/>
-                </a:solidFill>
-                <a:latin typeface="Consolas"/>
-              </a:rPr>
-              <a:t>;</a:t>
+                  <a:srgbClr val="6A9955"/>
+                </a:solidFill>
+                <a:latin typeface="Consolas"/>
+              </a:rPr>
+              <a:t>// Works: WifiCredentials satisfies Serialize + Deserialize.</a:t>
             </a:r>
           </a:p>
           <a:p>
@@ -7987,11 +7664,74 @@
             <a:r>
               <a:rPr sz="1600">
                 <a:solidFill>
-                  <a:srgbClr val="C792EA"/>
-                </a:solidFill>
-                <a:latin typeface="Consolas"/>
-              </a:rPr>
-              <a:t>let</a:t>
+                  <a:srgbClr val="EEFFFF"/>
+                </a:solidFill>
+                <a:latin typeface="Consolas"/>
+              </a:rPr>
+              <a:t>flash</a:t>
+            </a:r>
+            <a:r>
+              <a:rPr sz="1600">
+                <a:solidFill>
+                  <a:srgbClr val="BAC2DE"/>
+                </a:solidFill>
+                <a:latin typeface="Consolas"/>
+              </a:rPr>
+              <a:t>.</a:t>
+            </a:r>
+            <a:r>
+              <a:rPr sz="1600">
+                <a:solidFill>
+                  <a:srgbClr val="EEFFFF"/>
+                </a:solidFill>
+                <a:latin typeface="Consolas"/>
+              </a:rPr>
+              <a:t>save</a:t>
+            </a:r>
+            <a:r>
+              <a:rPr sz="1600">
+                <a:solidFill>
+                  <a:srgbClr val="BAC2DE"/>
+                </a:solidFill>
+                <a:latin typeface="Consolas"/>
+              </a:rPr>
+              <a:t>(</a:t>
+            </a:r>
+            <a:r>
+              <a:rPr sz="1600">
+                <a:solidFill>
+                  <a:srgbClr val="C3E88D"/>
+                </a:solidFill>
+                <a:latin typeface="Consolas"/>
+              </a:rPr>
+              <a:t>"</a:t>
+            </a:r>
+            <a:r>
+              <a:rPr sz="1600">
+                <a:solidFill>
+                  <a:srgbClr val="C3E88D"/>
+                </a:solidFill>
+                <a:latin typeface="Consolas"/>
+              </a:rPr>
+              <a:t>wifi</a:t>
+            </a:r>
+            <a:r>
+              <a:rPr sz="1600">
+                <a:solidFill>
+                  <a:srgbClr val="C3E88D"/>
+                </a:solidFill>
+                <a:latin typeface="Consolas"/>
+              </a:rPr>
+              <a:t>"</a:t>
+            </a:r>
+            <a:r>
+              <a:rPr sz="1600">
+                <a:solidFill>
+                  <a:srgbClr val="BAC2DE"/>
+                </a:solidFill>
+                <a:latin typeface="Consolas"/>
+              </a:rPr>
+              <a:t>,</a:t>
             </a:r>
             <a:r>
               <a:rPr sz="1600">
@@ -8005,74 +7745,20 @@
             <a:r>
               <a:rPr sz="1600">
                 <a:solidFill>
-                  <a:srgbClr val="EEFFFF"/>
-                </a:solidFill>
-                <a:latin typeface="Consolas"/>
-              </a:rPr>
-              <a:t>loaded</a:t>
-            </a:r>
-            <a:r>
-              <a:rPr sz="1600">
-                <a:solidFill>
-                  <a:srgbClr val="EEFFFF"/>
-                </a:solidFill>
-                <a:latin typeface="Consolas"/>
-              </a:rPr>
-              <a:t> </a:t>
-            </a:r>
-            <a:r>
-              <a:rPr sz="1600">
-                <a:solidFill>
                   <a:srgbClr val="89DDFF"/>
                 </a:solidFill>
                 <a:latin typeface="Consolas"/>
               </a:rPr>
-              <a:t>=</a:t>
-            </a:r>
-            <a:r>
-              <a:rPr sz="1600">
-                <a:solidFill>
-                  <a:srgbClr val="EEFFFF"/>
-                </a:solidFill>
-                <a:latin typeface="Consolas"/>
-              </a:rPr>
-              <a:t> </a:t>
-            </a:r>
-            <a:r>
-              <a:rPr sz="1600">
-                <a:solidFill>
-                  <a:srgbClr val="EEFFFF"/>
-                </a:solidFill>
-                <a:latin typeface="Consolas"/>
-              </a:rPr>
-              <a:t>loaded</a:t>
-            </a:r>
-            <a:r>
-              <a:rPr sz="1600">
-                <a:solidFill>
-                  <a:srgbClr val="BAC2DE"/>
-                </a:solidFill>
-                <a:latin typeface="Consolas"/>
-              </a:rPr>
-              <a:t>.</a:t>
-            </a:r>
-            <a:r>
-              <a:rPr sz="1600">
-                <a:solidFill>
-                  <a:srgbClr val="EEFFFF"/>
-                </a:solidFill>
-                <a:latin typeface="Consolas"/>
-              </a:rPr>
-              <a:t>unwrap</a:t>
-            </a:r>
-            <a:r>
-              <a:rPr sz="1600">
-                <a:solidFill>
-                  <a:srgbClr val="BAC2DE"/>
-                </a:solidFill>
-                <a:latin typeface="Consolas"/>
-              </a:rPr>
-              <a:t>(</a:t>
+              <a:t>&amp;</a:t>
+            </a:r>
+            <a:r>
+              <a:rPr sz="1600">
+                <a:solidFill>
+                  <a:srgbClr val="EEFFFF"/>
+                </a:solidFill>
+                <a:latin typeface="Consolas"/>
+              </a:rPr>
+              <a:t>credentials</a:t>
             </a:r>
             <a:r>
               <a:rPr sz="1600">
@@ -8082,6 +7768,15 @@
                 <a:latin typeface="Consolas"/>
               </a:rPr>
               <a:t>)</a:t>
+            </a:r>
+            <a:r>
+              <a:rPr sz="1600">
+                <a:solidFill>
+                  <a:srgbClr val="89DDFF"/>
+                </a:solidFill>
+                <a:latin typeface="Consolas"/>
+              </a:rPr>
+              <a:t>?</a:t>
             </a:r>
             <a:r>
               <a:rPr sz="1600">
@@ -8117,11 +7812,137 @@
             <a:r>
               <a:rPr sz="1600">
                 <a:solidFill>
-                  <a:srgbClr val="82AAFF"/>
-                </a:solidFill>
-                <a:latin typeface="Consolas"/>
-              </a:rPr>
-              <a:t>assert_eq!</a:t>
+                  <a:srgbClr val="C792EA"/>
+                </a:solidFill>
+                <a:latin typeface="Consolas"/>
+              </a:rPr>
+              <a:t>let</a:t>
+            </a:r>
+            <a:r>
+              <a:rPr sz="1600">
+                <a:solidFill>
+                  <a:srgbClr val="EEFFFF"/>
+                </a:solidFill>
+                <a:latin typeface="Consolas"/>
+              </a:rPr>
+              <a:t> </a:t>
+            </a:r>
+            <a:r>
+              <a:rPr sz="1600">
+                <a:solidFill>
+                  <a:srgbClr val="EEFFFF"/>
+                </a:solidFill>
+                <a:latin typeface="Consolas"/>
+              </a:rPr>
+              <a:t>loaded</a:t>
+            </a:r>
+            <a:r>
+              <a:rPr sz="1600">
+                <a:solidFill>
+                  <a:srgbClr val="BAC2DE"/>
+                </a:solidFill>
+                <a:latin typeface="Consolas"/>
+              </a:rPr>
+              <a:t>:</a:t>
+            </a:r>
+            <a:r>
+              <a:rPr sz="1600">
+                <a:solidFill>
+                  <a:srgbClr val="EEFFFF"/>
+                </a:solidFill>
+                <a:latin typeface="Consolas"/>
+              </a:rPr>
+              <a:t> </a:t>
+            </a:r>
+            <a:r>
+              <a:rPr sz="1600">
+                <a:solidFill>
+                  <a:srgbClr val="89DDFF"/>
+                </a:solidFill>
+                <a:latin typeface="Consolas"/>
+              </a:rPr>
+              <a:t>Option</a:t>
+            </a:r>
+            <a:r>
+              <a:rPr sz="1600">
+                <a:solidFill>
+                  <a:srgbClr val="89DDFF"/>
+                </a:solidFill>
+                <a:latin typeface="Consolas"/>
+              </a:rPr>
+              <a:t>&lt;</a:t>
+            </a:r>
+            <a:r>
+              <a:rPr sz="1600">
+                <a:solidFill>
+                  <a:srgbClr val="EEFFFF"/>
+                </a:solidFill>
+                <a:latin typeface="Consolas"/>
+              </a:rPr>
+              <a:t>WifiCredentials</a:t>
+            </a:r>
+            <a:r>
+              <a:rPr sz="1600">
+                <a:solidFill>
+                  <a:srgbClr val="89DDFF"/>
+                </a:solidFill>
+                <a:latin typeface="Consolas"/>
+              </a:rPr>
+              <a:t>&gt;</a:t>
+            </a:r>
+            <a:r>
+              <a:rPr sz="1600">
+                <a:solidFill>
+                  <a:srgbClr val="EEFFFF"/>
+                </a:solidFill>
+                <a:latin typeface="Consolas"/>
+              </a:rPr>
+              <a:t> </a:t>
+            </a:r>
+            <a:r>
+              <a:rPr sz="1600">
+                <a:solidFill>
+                  <a:srgbClr val="89DDFF"/>
+                </a:solidFill>
+                <a:latin typeface="Consolas"/>
+              </a:rPr>
+              <a:t>=</a:t>
+            </a:r>
+            <a:r>
+              <a:rPr sz="1600">
+                <a:solidFill>
+                  <a:srgbClr val="EEFFFF"/>
+                </a:solidFill>
+                <a:latin typeface="Consolas"/>
+              </a:rPr>
+              <a:t> </a:t>
+            </a:r>
+            <a:r>
+              <a:rPr sz="1600">
+                <a:solidFill>
+                  <a:srgbClr val="EEFFFF"/>
+                </a:solidFill>
+                <a:latin typeface="Consolas"/>
+              </a:rPr>
+              <a:t>flash</a:t>
+            </a:r>
+            <a:r>
+              <a:rPr sz="1600">
+                <a:solidFill>
+                  <a:srgbClr val="BAC2DE"/>
+                </a:solidFill>
+                <a:latin typeface="Consolas"/>
+              </a:rPr>
+              <a:t>.</a:t>
+            </a:r>
+            <a:r>
+              <a:rPr sz="1600">
+                <a:solidFill>
+                  <a:srgbClr val="EEFFFF"/>
+                </a:solidFill>
+                <a:latin typeface="Consolas"/>
+              </a:rPr>
+              <a:t>load</a:t>
             </a:r>
             <a:r>
               <a:rPr sz="1600">
@@ -8135,60 +7956,6 @@
             <a:r>
               <a:rPr sz="1600">
                 <a:solidFill>
-                  <a:srgbClr val="89DDFF"/>
-                </a:solidFill>
-                <a:latin typeface="Consolas"/>
-              </a:rPr>
-              <a:t>&amp;</a:t>
-            </a:r>
-            <a:r>
-              <a:rPr sz="1600">
-                <a:solidFill>
-                  <a:srgbClr val="EEFFFF"/>
-                </a:solidFill>
-                <a:latin typeface="Consolas"/>
-              </a:rPr>
-              <a:t>loaded</a:t>
-            </a:r>
-            <a:r>
-              <a:rPr sz="1600">
-                <a:solidFill>
-                  <a:srgbClr val="BAC2DE"/>
-                </a:solidFill>
-                <a:latin typeface="Consolas"/>
-              </a:rPr>
-              <a:t>.</a:t>
-            </a:r>
-            <a:r>
-              <a:rPr sz="1600">
-                <a:solidFill>
-                  <a:srgbClr val="EEFFFF"/>
-                </a:solidFill>
-                <a:latin typeface="Consolas"/>
-              </a:rPr>
-              <a:t>ssid</a:t>
-            </a:r>
-            <a:r>
-              <a:rPr sz="1600">
-                <a:solidFill>
-                  <a:srgbClr val="BAC2DE"/>
-                </a:solidFill>
-                <a:latin typeface="Consolas"/>
-              </a:rPr>
-              <a:t>,</a:t>
-            </a:r>
-            <a:r>
-              <a:rPr sz="1600">
-                <a:solidFill>
-                  <a:srgbClr val="EEFFFF"/>
-                </a:solidFill>
-                <a:latin typeface="Consolas"/>
-              </a:rPr>
-              <a:t> </a:t>
-            </a:r>
-            <a:r>
-              <a:rPr sz="1600">
-                <a:solidFill>
                   <a:srgbClr val="C3E88D"/>
                 </a:solidFill>
                 <a:latin typeface="Consolas"/>
@@ -8202,7 +7969,7 @@
                 </a:solidFill>
                 <a:latin typeface="Consolas"/>
               </a:rPr>
-              <a:t>HomeWiFi</a:t>
+              <a:t>wifi</a:t>
             </a:r>
             <a:r>
               <a:rPr sz="1600">
@@ -8256,11 +8023,83 @@
             <a:r>
               <a:rPr sz="1600">
                 <a:solidFill>
-                  <a:srgbClr val="82AAFF"/>
-                </a:solidFill>
-                <a:latin typeface="Consolas"/>
-              </a:rPr>
-              <a:t>assert_eq!</a:t>
+                  <a:srgbClr val="C792EA"/>
+                </a:solidFill>
+                <a:latin typeface="Consolas"/>
+              </a:rPr>
+              <a:t>let</a:t>
+            </a:r>
+            <a:r>
+              <a:rPr sz="1600">
+                <a:solidFill>
+                  <a:srgbClr val="EEFFFF"/>
+                </a:solidFill>
+                <a:latin typeface="Consolas"/>
+              </a:rPr>
+              <a:t> </a:t>
+            </a:r>
+            <a:r>
+              <a:rPr sz="1600">
+                <a:solidFill>
+                  <a:srgbClr val="EEFFFF"/>
+                </a:solidFill>
+                <a:latin typeface="Consolas"/>
+              </a:rPr>
+              <a:t>loaded</a:t>
+            </a:r>
+            <a:r>
+              <a:rPr sz="1600">
+                <a:solidFill>
+                  <a:srgbClr val="EEFFFF"/>
+                </a:solidFill>
+                <a:latin typeface="Consolas"/>
+              </a:rPr>
+              <a:t> </a:t>
+            </a:r>
+            <a:r>
+              <a:rPr sz="1600">
+                <a:solidFill>
+                  <a:srgbClr val="89DDFF"/>
+                </a:solidFill>
+                <a:latin typeface="Consolas"/>
+              </a:rPr>
+              <a:t>=</a:t>
+            </a:r>
+            <a:r>
+              <a:rPr sz="1600">
+                <a:solidFill>
+                  <a:srgbClr val="EEFFFF"/>
+                </a:solidFill>
+                <a:latin typeface="Consolas"/>
+              </a:rPr>
+              <a:t> </a:t>
+            </a:r>
+            <a:r>
+              <a:rPr sz="1600">
+                <a:solidFill>
+                  <a:srgbClr val="EEFFFF"/>
+                </a:solidFill>
+                <a:latin typeface="Consolas"/>
+              </a:rPr>
+              <a:t>loaded</a:t>
+            </a:r>
+            <a:r>
+              <a:rPr sz="1600">
+                <a:solidFill>
+                  <a:srgbClr val="BAC2DE"/>
+                </a:solidFill>
+                <a:latin typeface="Consolas"/>
+              </a:rPr>
+              <a:t>.</a:t>
+            </a:r>
+            <a:r>
+              <a:rPr sz="1600">
+                <a:solidFill>
+                  <a:srgbClr val="EEFFFF"/>
+                </a:solidFill>
+                <a:latin typeface="Consolas"/>
+              </a:rPr>
+              <a:t>unwrap</a:t>
             </a:r>
             <a:r>
               <a:rPr sz="1600">
@@ -8270,87 +8109,6 @@
                 <a:latin typeface="Consolas"/>
               </a:rPr>
               <a:t>(</a:t>
-            </a:r>
-            <a:r>
-              <a:rPr sz="1600">
-                <a:solidFill>
-                  <a:srgbClr val="89DDFF"/>
-                </a:solidFill>
-                <a:latin typeface="Consolas"/>
-              </a:rPr>
-              <a:t>&amp;</a:t>
-            </a:r>
-            <a:r>
-              <a:rPr sz="1600">
-                <a:solidFill>
-                  <a:srgbClr val="EEFFFF"/>
-                </a:solidFill>
-                <a:latin typeface="Consolas"/>
-              </a:rPr>
-              <a:t>loaded</a:t>
-            </a:r>
-            <a:r>
-              <a:rPr sz="1600">
-                <a:solidFill>
-                  <a:srgbClr val="BAC2DE"/>
-                </a:solidFill>
-                <a:latin typeface="Consolas"/>
-              </a:rPr>
-              <a:t>.</a:t>
-            </a:r>
-            <a:r>
-              <a:rPr sz="1600">
-                <a:solidFill>
-                  <a:srgbClr val="EEFFFF"/>
-                </a:solidFill>
-                <a:latin typeface="Consolas"/>
-              </a:rPr>
-              <a:t>password</a:t>
-            </a:r>
-            <a:r>
-              <a:rPr sz="1600">
-                <a:solidFill>
-                  <a:srgbClr val="BAC2DE"/>
-                </a:solidFill>
-                <a:latin typeface="Consolas"/>
-              </a:rPr>
-              <a:t>,</a:t>
-            </a:r>
-            <a:r>
-              <a:rPr sz="1600">
-                <a:solidFill>
-                  <a:srgbClr val="EEFFFF"/>
-                </a:solidFill>
-                <a:latin typeface="Consolas"/>
-              </a:rPr>
-              <a:t> </a:t>
-            </a:r>
-            <a:r>
-              <a:rPr sz="1600">
-                <a:solidFill>
-                  <a:srgbClr val="C3E88D"/>
-                </a:solidFill>
-                <a:latin typeface="Consolas"/>
-              </a:rPr>
-              <a:t>"</a:t>
-            </a:r>
-            <a:r>
-              <a:rPr sz="1600">
-                <a:solidFill>
-                  <a:srgbClr val="C3E88D"/>
-                </a:solidFill>
-                <a:latin typeface="Consolas"/>
-              </a:rPr>
-              <a:t>secret</a:t>
-            </a:r>
-            <a:r>
-              <a:rPr sz="1600">
-                <a:solidFill>
-                  <a:srgbClr val="C3E88D"/>
-                </a:solidFill>
-                <a:latin typeface="Consolas"/>
-              </a:rPr>
-              <a:t>"</a:t>
             </a:r>
             <a:r>
               <a:rPr sz="1600">
@@ -8383,6 +8141,132 @@
                 <a:spcPts val="0"/>
               </a:spcAft>
             </a:pPr>
+            <a:r>
+              <a:rPr sz="1600">
+                <a:solidFill>
+                  <a:srgbClr val="EEFFFF"/>
+                </a:solidFill>
+                <a:latin typeface="Consolas"/>
+              </a:rPr>
+              <a:t>    </a:t>
+            </a:r>
+            <a:r>
+              <a:rPr sz="1600">
+                <a:solidFill>
+                  <a:srgbClr val="82AAFF"/>
+                </a:solidFill>
+                <a:latin typeface="Consolas"/>
+              </a:rPr>
+              <a:t>assert_eq!</a:t>
+            </a:r>
+            <a:r>
+              <a:rPr sz="1600">
+                <a:solidFill>
+                  <a:srgbClr val="BAC2DE"/>
+                </a:solidFill>
+                <a:latin typeface="Consolas"/>
+              </a:rPr>
+              <a:t>(</a:t>
+            </a:r>
+            <a:r>
+              <a:rPr sz="1600">
+                <a:solidFill>
+                  <a:srgbClr val="89DDFF"/>
+                </a:solidFill>
+                <a:latin typeface="Consolas"/>
+              </a:rPr>
+              <a:t>&amp;</a:t>
+            </a:r>
+            <a:r>
+              <a:rPr sz="1600">
+                <a:solidFill>
+                  <a:srgbClr val="EEFFFF"/>
+                </a:solidFill>
+                <a:latin typeface="Consolas"/>
+              </a:rPr>
+              <a:t>loaded</a:t>
+            </a:r>
+            <a:r>
+              <a:rPr sz="1600">
+                <a:solidFill>
+                  <a:srgbClr val="BAC2DE"/>
+                </a:solidFill>
+                <a:latin typeface="Consolas"/>
+              </a:rPr>
+              <a:t>.</a:t>
+            </a:r>
+            <a:r>
+              <a:rPr sz="1600">
+                <a:solidFill>
+                  <a:srgbClr val="EEFFFF"/>
+                </a:solidFill>
+                <a:latin typeface="Consolas"/>
+              </a:rPr>
+              <a:t>ssid</a:t>
+            </a:r>
+            <a:r>
+              <a:rPr sz="1600">
+                <a:solidFill>
+                  <a:srgbClr val="BAC2DE"/>
+                </a:solidFill>
+                <a:latin typeface="Consolas"/>
+              </a:rPr>
+              <a:t>,</a:t>
+            </a:r>
+            <a:r>
+              <a:rPr sz="1600">
+                <a:solidFill>
+                  <a:srgbClr val="EEFFFF"/>
+                </a:solidFill>
+                <a:latin typeface="Consolas"/>
+              </a:rPr>
+              <a:t> </a:t>
+            </a:r>
+            <a:r>
+              <a:rPr sz="1600">
+                <a:solidFill>
+                  <a:srgbClr val="C3E88D"/>
+                </a:solidFill>
+                <a:latin typeface="Consolas"/>
+              </a:rPr>
+              <a:t>"</a:t>
+            </a:r>
+            <a:r>
+              <a:rPr sz="1600">
+                <a:solidFill>
+                  <a:srgbClr val="C3E88D"/>
+                </a:solidFill>
+                <a:latin typeface="Consolas"/>
+              </a:rPr>
+              <a:t>HomeWiFi</a:t>
+            </a:r>
+            <a:r>
+              <a:rPr sz="1600">
+                <a:solidFill>
+                  <a:srgbClr val="C3E88D"/>
+                </a:solidFill>
+                <a:latin typeface="Consolas"/>
+              </a:rPr>
+              <a:t>"</a:t>
+            </a:r>
+            <a:r>
+              <a:rPr sz="1600">
+                <a:solidFill>
+                  <a:srgbClr val="BAC2DE"/>
+                </a:solidFill>
+                <a:latin typeface="Consolas"/>
+              </a:rPr>
+              <a:t>)</a:t>
+            </a:r>
+            <a:r>
+              <a:rPr sz="1600">
+                <a:solidFill>
+                  <a:srgbClr val="BAC2DE"/>
+                </a:solidFill>
+                <a:latin typeface="Consolas"/>
+              </a:rPr>
+              <a:t>;</a:t>
+            </a:r>
           </a:p>
           <a:p>
             <a:pPr>
@@ -8408,11 +8292,38 @@
             <a:r>
               <a:rPr sz="1600">
                 <a:solidFill>
-                  <a:srgbClr val="EEFFFF"/>
-                </a:solidFill>
-                <a:latin typeface="Consolas"/>
-              </a:rPr>
-              <a:t>flash</a:t>
+                  <a:srgbClr val="82AAFF"/>
+                </a:solidFill>
+                <a:latin typeface="Consolas"/>
+              </a:rPr>
+              <a:t>assert_eq!</a:t>
+            </a:r>
+            <a:r>
+              <a:rPr sz="1600">
+                <a:solidFill>
+                  <a:srgbClr val="BAC2DE"/>
+                </a:solidFill>
+                <a:latin typeface="Consolas"/>
+              </a:rPr>
+              <a:t>(</a:t>
+            </a:r>
+            <a:r>
+              <a:rPr sz="1600">
+                <a:solidFill>
+                  <a:srgbClr val="89DDFF"/>
+                </a:solidFill>
+                <a:latin typeface="Consolas"/>
+              </a:rPr>
+              <a:t>&amp;</a:t>
+            </a:r>
+            <a:r>
+              <a:rPr sz="1600">
+                <a:solidFill>
+                  <a:srgbClr val="EEFFFF"/>
+                </a:solidFill>
+                <a:latin typeface="Consolas"/>
+              </a:rPr>
+              <a:t>loaded</a:t>
             </a:r>
             <a:r>
               <a:rPr sz="1600">
@@ -8430,16 +8341,52 @@
                 </a:solidFill>
                 <a:latin typeface="Consolas"/>
               </a:rPr>
-              <a:t>clear</a:t>
-            </a:r>
-            <a:r>
-              <a:rPr sz="1600">
-                <a:solidFill>
-                  <a:srgbClr val="BAC2DE"/>
-                </a:solidFill>
-                <a:latin typeface="Consolas"/>
-              </a:rPr>
-              <a:t>(</a:t>
+              <a:t>password</a:t>
+            </a:r>
+            <a:r>
+              <a:rPr sz="1600">
+                <a:solidFill>
+                  <a:srgbClr val="BAC2DE"/>
+                </a:solidFill>
+                <a:latin typeface="Consolas"/>
+              </a:rPr>
+              <a:t>,</a:t>
+            </a:r>
+            <a:r>
+              <a:rPr sz="1600">
+                <a:solidFill>
+                  <a:srgbClr val="EEFFFF"/>
+                </a:solidFill>
+                <a:latin typeface="Consolas"/>
+              </a:rPr>
+              <a:t> </a:t>
+            </a:r>
+            <a:r>
+              <a:rPr sz="1600">
+                <a:solidFill>
+                  <a:srgbClr val="C3E88D"/>
+                </a:solidFill>
+                <a:latin typeface="Consolas"/>
+              </a:rPr>
+              <a:t>"</a:t>
+            </a:r>
+            <a:r>
+              <a:rPr sz="1600">
+                <a:solidFill>
+                  <a:srgbClr val="C3E88D"/>
+                </a:solidFill>
+                <a:latin typeface="Consolas"/>
+              </a:rPr>
+              <a:t>secret</a:t>
+            </a:r>
+            <a:r>
+              <a:rPr sz="1600">
+                <a:solidFill>
+                  <a:srgbClr val="C3E88D"/>
+                </a:solidFill>
+                <a:latin typeface="Consolas"/>
+              </a:rPr>
+              <a:t>"</a:t>
             </a:r>
             <a:r>
               <a:rPr sz="1600">
@@ -8472,204 +8419,6 @@
                 <a:spcPts val="0"/>
               </a:spcAft>
             </a:pPr>
-            <a:r>
-              <a:rPr sz="1600">
-                <a:solidFill>
-                  <a:srgbClr val="EEFFFF"/>
-                </a:solidFill>
-                <a:latin typeface="Consolas"/>
-              </a:rPr>
-              <a:t>    </a:t>
-            </a:r>
-            <a:r>
-              <a:rPr sz="1600">
-                <a:solidFill>
-                  <a:srgbClr val="82AAFF"/>
-                </a:solidFill>
-                <a:latin typeface="Consolas"/>
-              </a:rPr>
-              <a:t>assert!</a:t>
-            </a:r>
-            <a:r>
-              <a:rPr sz="1600">
-                <a:solidFill>
-                  <a:srgbClr val="BAC2DE"/>
-                </a:solidFill>
-                <a:latin typeface="Consolas"/>
-              </a:rPr>
-              <a:t>(</a:t>
-            </a:r>
-            <a:r>
-              <a:rPr sz="1600">
-                <a:solidFill>
-                  <a:srgbClr val="EEFFFF"/>
-                </a:solidFill>
-                <a:latin typeface="Consolas"/>
-              </a:rPr>
-              <a:t>flash</a:t>
-            </a:r>
-            <a:r>
-              <a:rPr sz="1600">
-                <a:solidFill>
-                  <a:srgbClr val="BAC2DE"/>
-                </a:solidFill>
-                <a:latin typeface="Consolas"/>
-              </a:rPr>
-              <a:t>.</a:t>
-            </a:r>
-            <a:r>
-              <a:rPr sz="1600">
-                <a:solidFill>
-                  <a:srgbClr val="EEFFFF"/>
-                </a:solidFill>
-                <a:latin typeface="Consolas"/>
-              </a:rPr>
-              <a:t>load</a:t>
-            </a:r>
-            <a:r>
-              <a:rPr sz="1600">
-                <a:solidFill>
-                  <a:srgbClr val="EEFFFF"/>
-                </a:solidFill>
-                <a:latin typeface="Consolas"/>
-              </a:rPr>
-              <a:t>:</a:t>
-            </a:r>
-            <a:r>
-              <a:rPr sz="1600">
-                <a:solidFill>
-                  <a:srgbClr val="EEFFFF"/>
-                </a:solidFill>
-                <a:latin typeface="Consolas"/>
-              </a:rPr>
-              <a:t>:</a:t>
-            </a:r>
-            <a:r>
-              <a:rPr sz="1600">
-                <a:solidFill>
-                  <a:srgbClr val="89DDFF"/>
-                </a:solidFill>
-                <a:latin typeface="Consolas"/>
-              </a:rPr>
-              <a:t>&lt;</a:t>
-            </a:r>
-            <a:r>
-              <a:rPr sz="1600">
-                <a:solidFill>
-                  <a:srgbClr val="EEFFFF"/>
-                </a:solidFill>
-                <a:latin typeface="Consolas"/>
-              </a:rPr>
-              <a:t>WifiCredentials</a:t>
-            </a:r>
-            <a:r>
-              <a:rPr sz="1600">
-                <a:solidFill>
-                  <a:srgbClr val="89DDFF"/>
-                </a:solidFill>
-                <a:latin typeface="Consolas"/>
-              </a:rPr>
-              <a:t>&gt;</a:t>
-            </a:r>
-            <a:r>
-              <a:rPr sz="1600">
-                <a:solidFill>
-                  <a:srgbClr val="BAC2DE"/>
-                </a:solidFill>
-                <a:latin typeface="Consolas"/>
-              </a:rPr>
-              <a:t>(</a:t>
-            </a:r>
-            <a:r>
-              <a:rPr sz="1600">
-                <a:solidFill>
-                  <a:srgbClr val="C3E88D"/>
-                </a:solidFill>
-                <a:latin typeface="Consolas"/>
-              </a:rPr>
-              <a:t>"</a:t>
-            </a:r>
-            <a:r>
-              <a:rPr sz="1600">
-                <a:solidFill>
-                  <a:srgbClr val="C3E88D"/>
-                </a:solidFill>
-                <a:latin typeface="Consolas"/>
-              </a:rPr>
-              <a:t>wifi</a:t>
-            </a:r>
-            <a:r>
-              <a:rPr sz="1600">
-                <a:solidFill>
-                  <a:srgbClr val="C3E88D"/>
-                </a:solidFill>
-                <a:latin typeface="Consolas"/>
-              </a:rPr>
-              <a:t>"</a:t>
-            </a:r>
-            <a:r>
-              <a:rPr sz="1600">
-                <a:solidFill>
-                  <a:srgbClr val="BAC2DE"/>
-                </a:solidFill>
-                <a:latin typeface="Consolas"/>
-              </a:rPr>
-              <a:t>)</a:t>
-            </a:r>
-            <a:r>
-              <a:rPr sz="1600">
-                <a:solidFill>
-                  <a:srgbClr val="BAC2DE"/>
-                </a:solidFill>
-                <a:latin typeface="Consolas"/>
-              </a:rPr>
-              <a:t>.</a:t>
-            </a:r>
-            <a:r>
-              <a:rPr sz="1600">
-                <a:solidFill>
-                  <a:srgbClr val="EEFFFF"/>
-                </a:solidFill>
-                <a:latin typeface="Consolas"/>
-              </a:rPr>
-              <a:t>is_none</a:t>
-            </a:r>
-            <a:r>
-              <a:rPr sz="1600">
-                <a:solidFill>
-                  <a:srgbClr val="BAC2DE"/>
-                </a:solidFill>
-                <a:latin typeface="Consolas"/>
-              </a:rPr>
-              <a:t>(</a:t>
-            </a:r>
-            <a:r>
-              <a:rPr sz="1600">
-                <a:solidFill>
-                  <a:srgbClr val="BAC2DE"/>
-                </a:solidFill>
-                <a:latin typeface="Consolas"/>
-              </a:rPr>
-              <a:t>)</a:t>
-            </a:r>
-            <a:r>
-              <a:rPr sz="1600">
-                <a:solidFill>
-                  <a:srgbClr val="BAC2DE"/>
-                </a:solidFill>
-                <a:latin typeface="Consolas"/>
-              </a:rPr>
-              <a:t>)</a:t>
-            </a:r>
-            <a:r>
-              <a:rPr sz="1600">
-                <a:solidFill>
-                  <a:srgbClr val="BAC2DE"/>
-                </a:solidFill>
-                <a:latin typeface="Consolas"/>
-              </a:rPr>
-              <a:t>;</a:t>
-            </a:r>
           </a:p>
           <a:p>
             <a:pPr>
@@ -8683,6 +8432,69 @@
                 <a:spcPts val="0"/>
               </a:spcAft>
             </a:pPr>
+            <a:r>
+              <a:rPr sz="1600">
+                <a:solidFill>
+                  <a:srgbClr val="EEFFFF"/>
+                </a:solidFill>
+                <a:latin typeface="Consolas"/>
+              </a:rPr>
+              <a:t>    </a:t>
+            </a:r>
+            <a:r>
+              <a:rPr sz="1600">
+                <a:solidFill>
+                  <a:srgbClr val="EEFFFF"/>
+                </a:solidFill>
+                <a:latin typeface="Consolas"/>
+              </a:rPr>
+              <a:t>flash</a:t>
+            </a:r>
+            <a:r>
+              <a:rPr sz="1600">
+                <a:solidFill>
+                  <a:srgbClr val="BAC2DE"/>
+                </a:solidFill>
+                <a:latin typeface="Consolas"/>
+              </a:rPr>
+              <a:t>.</a:t>
+            </a:r>
+            <a:r>
+              <a:rPr sz="1600">
+                <a:solidFill>
+                  <a:srgbClr val="EEFFFF"/>
+                </a:solidFill>
+                <a:latin typeface="Consolas"/>
+              </a:rPr>
+              <a:t>clear</a:t>
+            </a:r>
+            <a:r>
+              <a:rPr sz="1600">
+                <a:solidFill>
+                  <a:srgbClr val="BAC2DE"/>
+                </a:solidFill>
+                <a:latin typeface="Consolas"/>
+              </a:rPr>
+              <a:t>(</a:t>
+            </a:r>
+            <a:r>
+              <a:rPr sz="1600">
+                <a:solidFill>
+                  <a:srgbClr val="BAC2DE"/>
+                </a:solidFill>
+                <a:latin typeface="Consolas"/>
+              </a:rPr>
+              <a:t>)</a:t>
+            </a:r>
+            <a:r>
+              <a:rPr sz="1600">
+                <a:solidFill>
+                  <a:srgbClr val="BAC2DE"/>
+                </a:solidFill>
+                <a:latin typeface="Consolas"/>
+              </a:rPr>
+              <a:t>;</a:t>
+            </a:r>
           </a:p>
           <a:p>
             <a:pPr>
@@ -8708,11 +8520,92 @@
             <a:r>
               <a:rPr sz="1600">
                 <a:solidFill>
+                  <a:srgbClr val="82AAFF"/>
+                </a:solidFill>
+                <a:latin typeface="Consolas"/>
+              </a:rPr>
+              <a:t>assert!</a:t>
+            </a:r>
+            <a:r>
+              <a:rPr sz="1600">
+                <a:solidFill>
+                  <a:srgbClr val="BAC2DE"/>
+                </a:solidFill>
+                <a:latin typeface="Consolas"/>
+              </a:rPr>
+              <a:t>(</a:t>
+            </a:r>
+            <a:r>
+              <a:rPr sz="1600">
+                <a:solidFill>
+                  <a:srgbClr val="EEFFFF"/>
+                </a:solidFill>
+                <a:latin typeface="Consolas"/>
+              </a:rPr>
+              <a:t>flash</a:t>
+            </a:r>
+            <a:r>
+              <a:rPr sz="1600">
+                <a:solidFill>
+                  <a:srgbClr val="BAC2DE"/>
+                </a:solidFill>
+                <a:latin typeface="Consolas"/>
+              </a:rPr>
+              <a:t>.</a:t>
+            </a:r>
+            <a:r>
+              <a:rPr sz="1600">
+                <a:solidFill>
+                  <a:srgbClr val="EEFFFF"/>
+                </a:solidFill>
+                <a:latin typeface="Consolas"/>
+              </a:rPr>
+              <a:t>load</a:t>
+            </a:r>
+            <a:r>
+              <a:rPr sz="1600">
+                <a:solidFill>
+                  <a:srgbClr val="BAC2DE"/>
+                </a:solidFill>
+                <a:latin typeface="Consolas"/>
+              </a:rPr>
+              <a:t>:</a:t>
+            </a:r>
+            <a:r>
+              <a:rPr sz="1600">
+                <a:solidFill>
+                  <a:srgbClr val="BAC2DE"/>
+                </a:solidFill>
+                <a:latin typeface="Consolas"/>
+              </a:rPr>
+              <a:t>:</a:t>
+            </a:r>
+            <a:r>
+              <a:rPr sz="1600">
+                <a:solidFill>
                   <a:srgbClr val="89DDFF"/>
                 </a:solidFill>
                 <a:latin typeface="Consolas"/>
               </a:rPr>
-              <a:t>Ok</a:t>
+              <a:t>&lt;</a:t>
+            </a:r>
+            <a:r>
+              <a:rPr sz="1600">
+                <a:solidFill>
+                  <a:srgbClr val="EEFFFF"/>
+                </a:solidFill>
+                <a:latin typeface="Consolas"/>
+              </a:rPr>
+              <a:t>WifiCredentials</a:t>
+            </a:r>
+            <a:r>
+              <a:rPr sz="1600">
+                <a:solidFill>
+                  <a:srgbClr val="89DDFF"/>
+                </a:solidFill>
+                <a:latin typeface="Consolas"/>
+              </a:rPr>
+              <a:t>&gt;</a:t>
             </a:r>
             <a:r>
               <a:rPr sz="1600">
@@ -8726,6 +8619,60 @@
             <a:r>
               <a:rPr sz="1600">
                 <a:solidFill>
+                  <a:srgbClr val="C3E88D"/>
+                </a:solidFill>
+                <a:latin typeface="Consolas"/>
+              </a:rPr>
+              <a:t>"</a:t>
+            </a:r>
+            <a:r>
+              <a:rPr sz="1600">
+                <a:solidFill>
+                  <a:srgbClr val="C3E88D"/>
+                </a:solidFill>
+                <a:latin typeface="Consolas"/>
+              </a:rPr>
+              <a:t>wifi</a:t>
+            </a:r>
+            <a:r>
+              <a:rPr sz="1600">
+                <a:solidFill>
+                  <a:srgbClr val="C3E88D"/>
+                </a:solidFill>
+                <a:latin typeface="Consolas"/>
+              </a:rPr>
+              <a:t>"</a:t>
+            </a:r>
+            <a:r>
+              <a:rPr sz="1600">
+                <a:solidFill>
+                  <a:srgbClr val="BAC2DE"/>
+                </a:solidFill>
+                <a:latin typeface="Consolas"/>
+              </a:rPr>
+              <a:t>)</a:t>
+            </a:r>
+            <a:r>
+              <a:rPr sz="1600">
+                <a:solidFill>
+                  <a:srgbClr val="BAC2DE"/>
+                </a:solidFill>
+                <a:latin typeface="Consolas"/>
+              </a:rPr>
+              <a:t>.</a:t>
+            </a:r>
+            <a:r>
+              <a:rPr sz="1600">
+                <a:solidFill>
+                  <a:srgbClr val="EEFFFF"/>
+                </a:solidFill>
+                <a:latin typeface="Consolas"/>
+              </a:rPr>
+              <a:t>is_none</a:t>
+            </a:r>
+            <a:r>
+              <a:rPr sz="1600">
+                <a:solidFill>
                   <a:srgbClr val="BAC2DE"/>
                 </a:solidFill>
                 <a:latin typeface="Consolas"/>
@@ -8749,6 +8696,15 @@
                 <a:latin typeface="Consolas"/>
               </a:rPr>
               <a:t>)</a:t>
+            </a:r>
+            <a:r>
+              <a:rPr sz="1600">
+                <a:solidFill>
+                  <a:srgbClr val="BAC2DE"/>
+                </a:solidFill>
+                <a:latin typeface="Consolas"/>
+              </a:rPr>
+              <a:t>;</a:t>
             </a:r>
           </a:p>
           <a:p>
@@ -8763,6 +8719,86 @@
                 <a:spcPts val="0"/>
               </a:spcAft>
             </a:pPr>
+          </a:p>
+          <a:p>
+            <a:pPr>
+              <a:lnSpc>
+                <a:spcPct val="95000"/>
+              </a:lnSpc>
+              <a:spcBef>
+                <a:spcPts val="0"/>
+              </a:spcBef>
+              <a:spcAft>
+                <a:spcPts val="0"/>
+              </a:spcAft>
+            </a:pPr>
+            <a:r>
+              <a:rPr sz="1600">
+                <a:solidFill>
+                  <a:srgbClr val="EEFFFF"/>
+                </a:solidFill>
+                <a:latin typeface="Consolas"/>
+              </a:rPr>
+              <a:t>    </a:t>
+            </a:r>
+            <a:r>
+              <a:rPr sz="1600">
+                <a:solidFill>
+                  <a:srgbClr val="89DDFF"/>
+                </a:solidFill>
+                <a:latin typeface="Consolas"/>
+              </a:rPr>
+              <a:t>Ok</a:t>
+            </a:r>
+            <a:r>
+              <a:rPr sz="1600">
+                <a:solidFill>
+                  <a:srgbClr val="BAC2DE"/>
+                </a:solidFill>
+                <a:latin typeface="Consolas"/>
+              </a:rPr>
+              <a:t>(</a:t>
+            </a:r>
+            <a:r>
+              <a:rPr sz="1600">
+                <a:solidFill>
+                  <a:srgbClr val="BAC2DE"/>
+                </a:solidFill>
+                <a:latin typeface="Consolas"/>
+              </a:rPr>
+              <a:t>(</a:t>
+            </a:r>
+            <a:r>
+              <a:rPr sz="1600">
+                <a:solidFill>
+                  <a:srgbClr val="BAC2DE"/>
+                </a:solidFill>
+                <a:latin typeface="Consolas"/>
+              </a:rPr>
+              <a:t>)</a:t>
+            </a:r>
+            <a:r>
+              <a:rPr sz="1600">
+                <a:solidFill>
+                  <a:srgbClr val="BAC2DE"/>
+                </a:solidFill>
+                <a:latin typeface="Consolas"/>
+              </a:rPr>
+              <a:t>)</a:t>
+            </a:r>
+          </a:p>
+          <a:p>
+            <a:pPr>
+              <a:lnSpc>
+                <a:spcPct val="95000"/>
+              </a:lnSpc>
+              <a:spcBef>
+                <a:spcPts val="0"/>
+              </a:spcBef>
+              <a:spcAft>
+                <a:spcPts val="0"/>
+              </a:spcAft>
+            </a:pPr>
             <a:r>
               <a:rPr sz="1600">
                 <a:solidFill>
@@ -8771,6 +8807,323 @@
                 <a:latin typeface="Consolas"/>
               </a:rPr>
               <a:t>}</a:t>
+            </a:r>
+          </a:p>
+          <a:p>
+            <a:pPr>
+              <a:lnSpc>
+                <a:spcPct val="95000"/>
+              </a:lnSpc>
+              <a:spcBef>
+                <a:spcPts val="0"/>
+              </a:spcBef>
+              <a:spcAft>
+                <a:spcPts val="0"/>
+              </a:spcAft>
+            </a:pPr>
+          </a:p>
+          <a:p>
+            <a:pPr>
+              <a:lnSpc>
+                <a:spcPct val="95000"/>
+              </a:lnSpc>
+              <a:spcBef>
+                <a:spcPts val="0"/>
+              </a:spcBef>
+              <a:spcAft>
+                <a:spcPts val="0"/>
+              </a:spcAft>
+            </a:pPr>
+            <a:r>
+              <a:rPr sz="1600">
+                <a:solidFill>
+                  <a:srgbClr val="6A9955"/>
+                </a:solidFill>
+                <a:latin typeface="Consolas"/>
+              </a:rPr>
+              <a:t>// TECHNIQUE NAMES (Examples 1-9):</a:t>
+            </a:r>
+          </a:p>
+          <a:p>
+            <a:pPr>
+              <a:lnSpc>
+                <a:spcPct val="95000"/>
+              </a:lnSpc>
+              <a:spcBef>
+                <a:spcPts val="0"/>
+              </a:spcBef>
+              <a:spcAft>
+                <a:spcPts val="0"/>
+              </a:spcAft>
+            </a:pPr>
+            <a:r>
+              <a:rPr sz="1600">
+                <a:solidFill>
+                  <a:srgbClr val="6A9955"/>
+                </a:solidFill>
+                <a:latin typeface="Consolas"/>
+              </a:rPr>
+              <a:t>// 1. Trait Default Methods      -- interface defines default implementation</a:t>
+            </a:r>
+          </a:p>
+          <a:p>
+            <a:pPr>
+              <a:lnSpc>
+                <a:spcPct val="95000"/>
+              </a:lnSpc>
+              <a:spcBef>
+                <a:spcPts val="0"/>
+              </a:spcBef>
+              <a:spcAft>
+                <a:spcPts val="0"/>
+              </a:spcAft>
+            </a:pPr>
+            <a:r>
+              <a:rPr sz="1600">
+                <a:solidFill>
+                  <a:srgbClr val="6A9955"/>
+                </a:solidFill>
+                <a:latin typeface="Consolas"/>
+              </a:rPr>
+              <a:t>// 2. Supertrait Default Methods -- #1 but with more levels</a:t>
+            </a:r>
+          </a:p>
+          <a:p>
+            <a:pPr>
+              <a:lnSpc>
+                <a:spcPct val="95000"/>
+              </a:lnSpc>
+              <a:spcBef>
+                <a:spcPts val="0"/>
+              </a:spcBef>
+              <a:spcAft>
+                <a:spcPts val="0"/>
+              </a:spcAft>
+            </a:pPr>
+            <a:r>
+              <a:rPr sz="1600">
+                <a:solidFill>
+                  <a:srgbClr val="6A9955"/>
+                </a:solidFill>
+                <a:latin typeface="Consolas"/>
+              </a:rPr>
+              <a:t>// 3. Extension Traits           -- add methods to one or few foreign types</a:t>
+            </a:r>
+          </a:p>
+          <a:p>
+            <a:pPr>
+              <a:lnSpc>
+                <a:spcPct val="95000"/>
+              </a:lnSpc>
+              <a:spcBef>
+                <a:spcPts val="0"/>
+              </a:spcBef>
+              <a:spcAft>
+                <a:spcPts val="0"/>
+              </a:spcAft>
+            </a:pPr>
+            <a:r>
+              <a:rPr sz="1600">
+                <a:solidFill>
+                  <a:srgbClr val="6A9955"/>
+                </a:solidFill>
+                <a:latin typeface="Consolas"/>
+              </a:rPr>
+              <a:t>// 4. Derive-Generated Implementations -- #[derive(Clone, Debug, etc.)]</a:t>
+            </a:r>
+          </a:p>
+          <a:p>
+            <a:pPr>
+              <a:lnSpc>
+                <a:spcPct val="95000"/>
+              </a:lnSpc>
+              <a:spcBef>
+                <a:spcPts val="0"/>
+              </a:spcBef>
+              <a:spcAft>
+                <a:spcPts val="0"/>
+              </a:spcAft>
+            </a:pPr>
+            <a:r>
+              <a:rPr sz="1600">
+                <a:solidFill>
+                  <a:srgbClr val="6A9955"/>
+                </a:solidFill>
+                <a:latin typeface="Consolas"/>
+              </a:rPr>
+              <a:t>// 5. Deref Method Lookup        -- add methods to concrete types</a:t>
+            </a:r>
+          </a:p>
+          <a:p>
+            <a:pPr>
+              <a:lnSpc>
+                <a:spcPct val="95000"/>
+              </a:lnSpc>
+              <a:spcBef>
+                <a:spcPts val="0"/>
+              </a:spcBef>
+              <a:spcAft>
+                <a:spcPts val="0"/>
+              </a:spcAft>
+            </a:pPr>
+            <a:r>
+              <a:rPr sz="1600">
+                <a:solidFill>
+                  <a:srgbClr val="6A9955"/>
+                </a:solidFill>
+                <a:latin typeface="Consolas"/>
+              </a:rPr>
+              <a:t>// 6. Blanket Implementation     -- add methods to all (foreign) types that satisfy</a:t>
+            </a:r>
+          </a:p>
+          <a:p>
+            <a:pPr>
+              <a:lnSpc>
+                <a:spcPct val="95000"/>
+              </a:lnSpc>
+              <a:spcBef>
+                <a:spcPts val="0"/>
+              </a:spcBef>
+              <a:spcAft>
+                <a:spcPts val="0"/>
+              </a:spcAft>
+            </a:pPr>
+            <a:r>
+              <a:rPr sz="1600">
+                <a:solidFill>
+                  <a:srgbClr val="6A9955"/>
+                </a:solidFill>
+                <a:latin typeface="Consolas"/>
+              </a:rPr>
+              <a:t>// 7. Macro-Generated Implementation Reuse -- when #2 doesn't work</a:t>
+            </a:r>
+          </a:p>
+          <a:p>
+            <a:pPr>
+              <a:lnSpc>
+                <a:spcPct val="95000"/>
+              </a:lnSpc>
+              <a:spcBef>
+                <a:spcPts val="0"/>
+              </a:spcBef>
+              <a:spcAft>
+                <a:spcPts val="0"/>
+              </a:spcAft>
+            </a:pPr>
+            <a:r>
+              <a:rPr sz="1600">
+                <a:solidFill>
+                  <a:srgbClr val="6A9955"/>
+                </a:solidFill>
+                <a:latin typeface="Consolas"/>
+              </a:rPr>
+              <a:t>// 8. Constraint-Gated Methods   -- e.g. when N=8, add a method</a:t>
+            </a:r>
+          </a:p>
+        </p:txBody>
+      </p:sp>
+    </p:spTree>
+  </p:cSld>
+  <p:clrMapOvr>
+    <a:masterClrMapping/>
+  </p:clrMapOvr>
+</p:sld>
+</file>
+
+<file path=ppt/slides/slide5.xml><?xml version="1.0" encoding="utf-8"?>
+<p:sld xmlns:a="http://schemas.openxmlformats.org/drawingml/2006/main" xmlns:p="http://schemas.openxmlformats.org/presentationml/2006/main" xmlns:r="http://schemas.openxmlformats.org/officeDocument/2006/relationships">
+  <p:cSld>
+    <p:spTree>
+      <p:nvGrpSpPr>
+        <p:cNvPr id="1" name=""/>
+        <p:cNvGrpSpPr/>
+        <p:nvPr/>
+      </p:nvGrpSpPr>
+      <p:grpSpPr/>
+      <p:sp>
+        <p:nvSpPr>
+          <p:cNvPr id="2" name="Rectangle 1"/>
+          <p:cNvSpPr/>
+          <p:nvPr/>
+        </p:nvSpPr>
+        <p:spPr>
+          <a:xfrm>
+            <a:off x="0" y="0"/>
+            <a:ext cx="9144000" cy="6858000"/>
+          </a:xfrm>
+          <a:prstGeom prst="rect">
+            <a:avLst/>
+          </a:prstGeom>
+          <a:solidFill>
+            <a:srgbClr val="000000"/>
+          </a:solidFill>
+          <a:ln>
+            <a:noFill/>
+          </a:ln>
+        </p:spPr>
+        <p:style>
+          <a:lnRef idx="1">
+            <a:schemeClr val="accent1"/>
+          </a:lnRef>
+          <a:fillRef idx="3">
+            <a:schemeClr val="accent1"/>
+          </a:fillRef>
+          <a:effectRef idx="2">
+            <a:schemeClr val="accent1"/>
+          </a:effectRef>
+          <a:fontRef idx="minor">
+            <a:schemeClr val="lt1"/>
+          </a:fontRef>
+        </p:style>
+        <p:txBody>
+          <a:bodyPr rtlCol="0" anchor="ctr"/>
+          <a:lstStyle/>
+          <a:p>
+            <a:pPr algn="ctr"/>
+          </a:p>
+        </p:txBody>
+      </p:sp>
+      <p:sp>
+        <p:nvSpPr>
+          <p:cNvPr id="3" name="TextBox 2"/>
+          <p:cNvSpPr txBox="1"/>
+          <p:nvPr/>
+        </p:nvSpPr>
+        <p:spPr>
+          <a:xfrm>
+            <a:off x="164592" y="109728"/>
+            <a:ext cx="8814816" cy="6638544"/>
+          </a:xfrm>
+          <a:prstGeom prst="rect">
+            <a:avLst/>
+          </a:prstGeom>
+          <a:noFill/>
+        </p:spPr>
+        <p:txBody>
+          <a:bodyPr wrap="square">
+            <a:noAutofit/>
+          </a:bodyPr>
+          <a:lstStyle/>
+          <a:p>
+            <a:pPr>
+              <a:lnSpc>
+                <a:spcPct val="95000"/>
+              </a:lnSpc>
+              <a:spcBef>
+                <a:spcPts val="0"/>
+              </a:spcBef>
+              <a:spcAft>
+                <a:spcPts val="0"/>
+              </a:spcAft>
+            </a:pPr>
+            <a:r>
+              <a:rPr sz="1600">
+                <a:solidFill>
+                  <a:srgbClr val="6A9955"/>
+                </a:solidFill>
+                <a:latin typeface="Consolas"/>
+              </a:rPr>
+              <a:t>// 9. Method-Level Constraints   -- e.g. method defined when T: Serialize + Deserialize</a:t>
             </a:r>
           </a:p>
         </p:txBody>

--- a/docs/example9_walkthrough.pptx
+++ b/docs/example9_walkthrough.pptx
@@ -9,9 +9,8 @@
     <p:sldId id="257" r:id="rId8"/>
     <p:sldId id="258" r:id="rId9"/>
     <p:sldId id="259" r:id="rId10"/>
-    <p:sldId id="260" r:id="rId11"/>
   </p:sldIdLst>
-  <p:sldSz cx="9144000" cy="6858000" type="screen4x3"/>
+  <p:sldSz cx="12192000" cy="6858000" type="screen4x3"/>
   <p:notesSz cx="6858000" cy="9144000"/>
   <p:defaultTextStyle>
     <a:defPPr>
@@ -3101,7 +3100,7 @@
         <p:spPr>
           <a:xfrm>
             <a:off x="0" y="0"/>
-            <a:ext cx="9144000" cy="6858000"/>
+            <a:ext cx="12192000" cy="6858000"/>
           </a:xfrm>
           <a:prstGeom prst="rect">
             <a:avLst/>
@@ -3143,7 +3142,7 @@
         </p:nvSpPr>
         <p:spPr>
           <a:xfrm>
-            <a:off x="7543800" y="0"/>
+            <a:off x="10591800" y="0"/>
             <a:ext cx="1600200" cy="6858000"/>
           </a:xfrm>
           <a:prstGeom prst="rect">
@@ -3188,7 +3187,7 @@
         </p:nvSpPr>
         <p:spPr>
           <a:xfrm rot="16200000">
-            <a:off x="7616952" y="274320"/>
+            <a:off x="10664952" y="274320"/>
             <a:ext cx="1453896" cy="6309360"/>
           </a:xfrm>
           <a:prstGeom prst="rect">
@@ -3225,7 +3224,7 @@
         <p:spPr>
           <a:xfrm>
             <a:off x="731520" y="502920"/>
-            <a:ext cx="6446520" cy="1051560"/>
+            <a:ext cx="9494520" cy="1051560"/>
           </a:xfrm>
           <a:prstGeom prst="rect">
             <a:avLst/>
@@ -3374,8 +3373,8 @@
         </p:blipFill>
         <p:spPr>
           <a:xfrm>
-            <a:off x="274319" y="1691640"/>
-            <a:ext cx="6995160" cy="4689169"/>
+            <a:off x="1681103" y="1691640"/>
+            <a:ext cx="7229592" cy="4846320"/>
           </a:xfrm>
           <a:prstGeom prst="rect">
             <a:avLst/>
@@ -3409,7 +3408,7 @@
         <p:spPr>
           <a:xfrm>
             <a:off x="0" y="0"/>
-            <a:ext cx="9144000" cy="6858000"/>
+            <a:ext cx="12192000" cy="6858000"/>
           </a:xfrm>
           <a:prstGeom prst="rect">
             <a:avLst/>
@@ -3452,7 +3451,7 @@
         <p:spPr>
           <a:xfrm>
             <a:off x="164592" y="109728"/>
-            <a:ext cx="8814816" cy="6638544"/>
+            <a:ext cx="11862816" cy="6638544"/>
           </a:xfrm>
           <a:prstGeom prst="rect">
             <a:avLst/>
@@ -4929,7 +4928,7 @@
         <p:spPr>
           <a:xfrm>
             <a:off x="0" y="0"/>
-            <a:ext cx="9144000" cy="6858000"/>
+            <a:ext cx="12192000" cy="6858000"/>
           </a:xfrm>
           <a:prstGeom prst="rect">
             <a:avLst/>
@@ -4972,7 +4971,7 @@
         <p:spPr>
           <a:xfrm>
             <a:off x="164592" y="109728"/>
-            <a:ext cx="8814816" cy="6638544"/>
+            <a:ext cx="11862816" cy="6638544"/>
           </a:xfrm>
           <a:prstGeom prst="rect">
             <a:avLst/>
@@ -7259,7 +7258,7 @@
         <p:spPr>
           <a:xfrm>
             <a:off x="0" y="0"/>
-            <a:ext cx="9144000" cy="6858000"/>
+            <a:ext cx="12192000" cy="6858000"/>
           </a:xfrm>
           <a:prstGeom prst="rect">
             <a:avLst/>
@@ -7302,7 +7301,7 @@
         <p:spPr>
           <a:xfrm>
             <a:off x="164592" y="109728"/>
-            <a:ext cx="8814816" cy="6638544"/>
+            <a:ext cx="11862816" cy="6638544"/>
           </a:xfrm>
           <a:prstGeom prst="rect">
             <a:avLst/>
@@ -8807,323 +8806,6 @@
                 <a:latin typeface="Consolas"/>
               </a:rPr>
               <a:t>}</a:t>
-            </a:r>
-          </a:p>
-          <a:p>
-            <a:pPr>
-              <a:lnSpc>
-                <a:spcPct val="95000"/>
-              </a:lnSpc>
-              <a:spcBef>
-                <a:spcPts val="0"/>
-              </a:spcBef>
-              <a:spcAft>
-                <a:spcPts val="0"/>
-              </a:spcAft>
-            </a:pPr>
-          </a:p>
-          <a:p>
-            <a:pPr>
-              <a:lnSpc>
-                <a:spcPct val="95000"/>
-              </a:lnSpc>
-              <a:spcBef>
-                <a:spcPts val="0"/>
-              </a:spcBef>
-              <a:spcAft>
-                <a:spcPts val="0"/>
-              </a:spcAft>
-            </a:pPr>
-            <a:r>
-              <a:rPr sz="1600">
-                <a:solidFill>
-                  <a:srgbClr val="6A9955"/>
-                </a:solidFill>
-                <a:latin typeface="Consolas"/>
-              </a:rPr>
-              <a:t>// TECHNIQUE NAMES (Examples 1-9):</a:t>
-            </a:r>
-          </a:p>
-          <a:p>
-            <a:pPr>
-              <a:lnSpc>
-                <a:spcPct val="95000"/>
-              </a:lnSpc>
-              <a:spcBef>
-                <a:spcPts val="0"/>
-              </a:spcBef>
-              <a:spcAft>
-                <a:spcPts val="0"/>
-              </a:spcAft>
-            </a:pPr>
-            <a:r>
-              <a:rPr sz="1600">
-                <a:solidFill>
-                  <a:srgbClr val="6A9955"/>
-                </a:solidFill>
-                <a:latin typeface="Consolas"/>
-              </a:rPr>
-              <a:t>// 1. Trait Default Methods      -- interface defines default implementation</a:t>
-            </a:r>
-          </a:p>
-          <a:p>
-            <a:pPr>
-              <a:lnSpc>
-                <a:spcPct val="95000"/>
-              </a:lnSpc>
-              <a:spcBef>
-                <a:spcPts val="0"/>
-              </a:spcBef>
-              <a:spcAft>
-                <a:spcPts val="0"/>
-              </a:spcAft>
-            </a:pPr>
-            <a:r>
-              <a:rPr sz="1600">
-                <a:solidFill>
-                  <a:srgbClr val="6A9955"/>
-                </a:solidFill>
-                <a:latin typeface="Consolas"/>
-              </a:rPr>
-              <a:t>// 2. Supertrait Default Methods -- #1 but with more levels</a:t>
-            </a:r>
-          </a:p>
-          <a:p>
-            <a:pPr>
-              <a:lnSpc>
-                <a:spcPct val="95000"/>
-              </a:lnSpc>
-              <a:spcBef>
-                <a:spcPts val="0"/>
-              </a:spcBef>
-              <a:spcAft>
-                <a:spcPts val="0"/>
-              </a:spcAft>
-            </a:pPr>
-            <a:r>
-              <a:rPr sz="1600">
-                <a:solidFill>
-                  <a:srgbClr val="6A9955"/>
-                </a:solidFill>
-                <a:latin typeface="Consolas"/>
-              </a:rPr>
-              <a:t>// 3. Extension Traits           -- add methods to one or few foreign types</a:t>
-            </a:r>
-          </a:p>
-          <a:p>
-            <a:pPr>
-              <a:lnSpc>
-                <a:spcPct val="95000"/>
-              </a:lnSpc>
-              <a:spcBef>
-                <a:spcPts val="0"/>
-              </a:spcBef>
-              <a:spcAft>
-                <a:spcPts val="0"/>
-              </a:spcAft>
-            </a:pPr>
-            <a:r>
-              <a:rPr sz="1600">
-                <a:solidFill>
-                  <a:srgbClr val="6A9955"/>
-                </a:solidFill>
-                <a:latin typeface="Consolas"/>
-              </a:rPr>
-              <a:t>// 4. Derive-Generated Implementations -- #[derive(Clone, Debug, etc.)]</a:t>
-            </a:r>
-          </a:p>
-          <a:p>
-            <a:pPr>
-              <a:lnSpc>
-                <a:spcPct val="95000"/>
-              </a:lnSpc>
-              <a:spcBef>
-                <a:spcPts val="0"/>
-              </a:spcBef>
-              <a:spcAft>
-                <a:spcPts val="0"/>
-              </a:spcAft>
-            </a:pPr>
-            <a:r>
-              <a:rPr sz="1600">
-                <a:solidFill>
-                  <a:srgbClr val="6A9955"/>
-                </a:solidFill>
-                <a:latin typeface="Consolas"/>
-              </a:rPr>
-              <a:t>// 5. Deref Method Lookup        -- add methods to concrete types</a:t>
-            </a:r>
-          </a:p>
-          <a:p>
-            <a:pPr>
-              <a:lnSpc>
-                <a:spcPct val="95000"/>
-              </a:lnSpc>
-              <a:spcBef>
-                <a:spcPts val="0"/>
-              </a:spcBef>
-              <a:spcAft>
-                <a:spcPts val="0"/>
-              </a:spcAft>
-            </a:pPr>
-            <a:r>
-              <a:rPr sz="1600">
-                <a:solidFill>
-                  <a:srgbClr val="6A9955"/>
-                </a:solidFill>
-                <a:latin typeface="Consolas"/>
-              </a:rPr>
-              <a:t>// 6. Blanket Implementation     -- add methods to all (foreign) types that satisfy</a:t>
-            </a:r>
-          </a:p>
-          <a:p>
-            <a:pPr>
-              <a:lnSpc>
-                <a:spcPct val="95000"/>
-              </a:lnSpc>
-              <a:spcBef>
-                <a:spcPts val="0"/>
-              </a:spcBef>
-              <a:spcAft>
-                <a:spcPts val="0"/>
-              </a:spcAft>
-            </a:pPr>
-            <a:r>
-              <a:rPr sz="1600">
-                <a:solidFill>
-                  <a:srgbClr val="6A9955"/>
-                </a:solidFill>
-                <a:latin typeface="Consolas"/>
-              </a:rPr>
-              <a:t>// 7. Macro-Generated Implementation Reuse -- when #2 doesn't work</a:t>
-            </a:r>
-          </a:p>
-          <a:p>
-            <a:pPr>
-              <a:lnSpc>
-                <a:spcPct val="95000"/>
-              </a:lnSpc>
-              <a:spcBef>
-                <a:spcPts val="0"/>
-              </a:spcBef>
-              <a:spcAft>
-                <a:spcPts val="0"/>
-              </a:spcAft>
-            </a:pPr>
-            <a:r>
-              <a:rPr sz="1600">
-                <a:solidFill>
-                  <a:srgbClr val="6A9955"/>
-                </a:solidFill>
-                <a:latin typeface="Consolas"/>
-              </a:rPr>
-              <a:t>// 8. Constraint-Gated Methods   -- e.g. when N=8, add a method</a:t>
-            </a:r>
-          </a:p>
-        </p:txBody>
-      </p:sp>
-    </p:spTree>
-  </p:cSld>
-  <p:clrMapOvr>
-    <a:masterClrMapping/>
-  </p:clrMapOvr>
-</p:sld>
-</file>
-
-<file path=ppt/slides/slide5.xml><?xml version="1.0" encoding="utf-8"?>
-<p:sld xmlns:a="http://schemas.openxmlformats.org/drawingml/2006/main" xmlns:p="http://schemas.openxmlformats.org/presentationml/2006/main" xmlns:r="http://schemas.openxmlformats.org/officeDocument/2006/relationships">
-  <p:cSld>
-    <p:spTree>
-      <p:nvGrpSpPr>
-        <p:cNvPr id="1" name=""/>
-        <p:cNvGrpSpPr/>
-        <p:nvPr/>
-      </p:nvGrpSpPr>
-      <p:grpSpPr/>
-      <p:sp>
-        <p:nvSpPr>
-          <p:cNvPr id="2" name="Rectangle 1"/>
-          <p:cNvSpPr/>
-          <p:nvPr/>
-        </p:nvSpPr>
-        <p:spPr>
-          <a:xfrm>
-            <a:off x="0" y="0"/>
-            <a:ext cx="9144000" cy="6858000"/>
-          </a:xfrm>
-          <a:prstGeom prst="rect">
-            <a:avLst/>
-          </a:prstGeom>
-          <a:solidFill>
-            <a:srgbClr val="000000"/>
-          </a:solidFill>
-          <a:ln>
-            <a:noFill/>
-          </a:ln>
-        </p:spPr>
-        <p:style>
-          <a:lnRef idx="1">
-            <a:schemeClr val="accent1"/>
-          </a:lnRef>
-          <a:fillRef idx="3">
-            <a:schemeClr val="accent1"/>
-          </a:fillRef>
-          <a:effectRef idx="2">
-            <a:schemeClr val="accent1"/>
-          </a:effectRef>
-          <a:fontRef idx="minor">
-            <a:schemeClr val="lt1"/>
-          </a:fontRef>
-        </p:style>
-        <p:txBody>
-          <a:bodyPr rtlCol="0" anchor="ctr"/>
-          <a:lstStyle/>
-          <a:p>
-            <a:pPr algn="ctr"/>
-          </a:p>
-        </p:txBody>
-      </p:sp>
-      <p:sp>
-        <p:nvSpPr>
-          <p:cNvPr id="3" name="TextBox 2"/>
-          <p:cNvSpPr txBox="1"/>
-          <p:nvPr/>
-        </p:nvSpPr>
-        <p:spPr>
-          <a:xfrm>
-            <a:off x="164592" y="109728"/>
-            <a:ext cx="8814816" cy="6638544"/>
-          </a:xfrm>
-          <a:prstGeom prst="rect">
-            <a:avLst/>
-          </a:prstGeom>
-          <a:noFill/>
-        </p:spPr>
-        <p:txBody>
-          <a:bodyPr wrap="square">
-            <a:noAutofit/>
-          </a:bodyPr>
-          <a:lstStyle/>
-          <a:p>
-            <a:pPr>
-              <a:lnSpc>
-                <a:spcPct val="95000"/>
-              </a:lnSpc>
-              <a:spcBef>
-                <a:spcPts val="0"/>
-              </a:spcBef>
-              <a:spcAft>
-                <a:spcPts val="0"/>
-              </a:spcAft>
-            </a:pPr>
-            <a:r>
-              <a:rPr sz="1600">
-                <a:solidFill>
-                  <a:srgbClr val="6A9955"/>
-                </a:solidFill>
-                <a:latin typeface="Consolas"/>
-              </a:rPr>
-              <a:t>// 9. Method-Level Constraints   -- e.g. method defined when T: Serialize + Deserialize</a:t>
             </a:r>
           </a:p>
         </p:txBody>
